--- a/qqq-market-insight/deliverables/presentation/QQQ_Technical_Indicator_Presentation.pptx
+++ b/qqq-market-insight/deliverables/presentation/QQQ_Technical_Indicator_Presentation.pptx
@@ -5,7 +5,7 @@
     <p:sldMasterId id="2147483648" r:id="rId1"/>
   </p:sldMasterIdLst>
   <p:notesMasterIdLst>
-    <p:notesMasterId r:id="rId24"/>
+    <p:notesMasterId r:id="rId23"/>
   </p:notesMasterIdLst>
   <p:sldIdLst>
     <p:sldId id="256" r:id="rId2"/>
@@ -24,12 +24,11 @@
     <p:sldId id="276" r:id="rId15"/>
     <p:sldId id="277" r:id="rId16"/>
     <p:sldId id="279" r:id="rId17"/>
-    <p:sldId id="278" r:id="rId18"/>
-    <p:sldId id="263" r:id="rId19"/>
-    <p:sldId id="265" r:id="rId20"/>
-    <p:sldId id="267" r:id="rId21"/>
-    <p:sldId id="268" r:id="rId22"/>
-    <p:sldId id="266" r:id="rId23"/>
+    <p:sldId id="263" r:id="rId18"/>
+    <p:sldId id="265" r:id="rId19"/>
+    <p:sldId id="267" r:id="rId20"/>
+    <p:sldId id="268" r:id="rId21"/>
+    <p:sldId id="266" r:id="rId22"/>
   </p:sldIdLst>
   <p:sldSz cx="12192000" cy="6858000"/>
   <p:notesSz cx="6858000" cy="9144000"/>
@@ -128,6 +127,11 @@
       </a:defRPr>
     </a:lvl9pPr>
   </p:defaultTextStyle>
+  <p:extLst>
+    <p:ext uri="{EFAFB233-063F-42B5-8137-9DF3F51BA10A}">
+      <p15:sldGuideLst xmlns:p15="http://schemas.microsoft.com/office/powerpoint/2012/main"/>
+    </p:ext>
+  </p:extLst>
 </p:presentation>
 </file>
 
@@ -1097,13 +1101,7 @@
   <p:cSld>
     <p:spTree>
       <p:nvGrpSpPr>
-        <p:cNvPr id="1" name="">
-          <a:extLst>
-            <a:ext uri="{FF2B5EF4-FFF2-40B4-BE49-F238E27FC236}">
-              <a16:creationId xmlns:a16="http://schemas.microsoft.com/office/drawing/2014/main" id="{11AF466E-B6BA-C96F-053F-C8F5C31B0588}"/>
-            </a:ext>
-          </a:extLst>
-        </p:cNvPr>
+        <p:cNvPr id="1" name=""/>
         <p:cNvGrpSpPr/>
         <p:nvPr/>
       </p:nvGrpSpPr>
@@ -1117,13 +1115,7 @@
       </p:grpSpPr>
       <p:sp>
         <p:nvSpPr>
-          <p:cNvPr id="2" name="Slide Image Placeholder 1">
-            <a:extLst>
-              <a:ext uri="{FF2B5EF4-FFF2-40B4-BE49-F238E27FC236}">
-                <a16:creationId xmlns:a16="http://schemas.microsoft.com/office/drawing/2014/main" id="{847E106B-677C-B1B3-A4AF-A4EB4055BF45}"/>
-              </a:ext>
-            </a:extLst>
-          </p:cNvPr>
+          <p:cNvPr id="2" name="Slide Image Placeholder 1"/>
           <p:cNvSpPr>
             <a:spLocks noGrp="1" noRot="1" noChangeAspect="1"/>
           </p:cNvSpPr>
@@ -1135,13 +1127,7 @@
       </p:sp>
       <p:sp>
         <p:nvSpPr>
-          <p:cNvPr id="3" name="Notes Placeholder 2">
-            <a:extLst>
-              <a:ext uri="{FF2B5EF4-FFF2-40B4-BE49-F238E27FC236}">
-                <a16:creationId xmlns:a16="http://schemas.microsoft.com/office/drawing/2014/main" id="{BEB0A0D2-A4F3-12E2-FF31-C48FCF27F7D6}"/>
-              </a:ext>
-            </a:extLst>
-          </p:cNvPr>
+          <p:cNvPr id="3" name="Notes Placeholder 2"/>
           <p:cNvSpPr>
             <a:spLocks noGrp="1"/>
           </p:cNvSpPr>
@@ -1155,20 +1141,14 @@
           <a:lstStyle/>
           <a:p>
             <a:r>
-              <a:t>The Random Forest is intentionally constrained rather than tuned aggressively. The study compares it against two baselines and uses expanding validation folds so each fold trains only on earlier dates.</a:t>
-            </a:r>
-          </a:p>
-        </p:txBody>
-      </p:sp>
-      <p:sp>
-        <p:nvSpPr>
-          <p:cNvPr id="4" name="Slide Number Placeholder 3">
-            <a:extLst>
-              <a:ext uri="{FF2B5EF4-FFF2-40B4-BE49-F238E27FC236}">
-                <a16:creationId xmlns:a16="http://schemas.microsoft.com/office/drawing/2014/main" id="{6C94BC91-5CE8-9EA6-90BB-3C9473974235}"/>
-              </a:ext>
-            </a:extLst>
-          </p:cNvPr>
+              <a:t>This is the central evaluation result. The Random Forest balanced accuracy is 0.505 and ROC AUC is 0.495. Its raw accuracy is 0.511, below the 0.543 majority baseline. These values do not support useful next-day classification.</a:t>
+            </a:r>
+          </a:p>
+        </p:txBody>
+      </p:sp>
+      <p:sp>
+        <p:nvSpPr>
+          <p:cNvPr id="4" name="Slide Number Placeholder 3"/>
           <p:cNvSpPr>
             <a:spLocks noGrp="1"/>
           </p:cNvSpPr>
@@ -1186,11 +1166,6 @@
         </p:txBody>
       </p:sp>
     </p:spTree>
-    <p:extLst>
-      <p:ext uri="{BB962C8B-B14F-4D97-AF65-F5344CB8AC3E}">
-        <p14:creationId xmlns:p14="http://schemas.microsoft.com/office/powerpoint/2010/main" val="2121750928"/>
-      </p:ext>
-    </p:extLst>
   </p:cSld>
   <p:clrMapOvr>
     <a:masterClrMapping/>
@@ -1243,7 +1218,8 @@
           <a:lstStyle/>
           <a:p>
             <a:r>
-              <a:t>This is the central evaluation result. The Random Forest balanced accuracy is 0.505 and ROC AUC is 0.495. Its raw accuracy is 0.511, below the 0.543 majority baseline. These values do not support useful next-day classification.</a:t>
+              <a:rPr dirty="0"/>
+              <a:t>Answer each research question directly. Avoid saying that an indicator affects or drives QQQ. The evidence supports only a weak, sample-specific ranking with no useful aggregate predictive performance.</a:t>
             </a:r>
           </a:p>
         </p:txBody>
@@ -1280,7 +1256,13 @@
   <p:cSld>
     <p:spTree>
       <p:nvGrpSpPr>
-        <p:cNvPr id="1" name=""/>
+        <p:cNvPr id="1" name="">
+          <a:extLst>
+            <a:ext uri="{FF2B5EF4-FFF2-40B4-BE49-F238E27FC236}">
+              <a16:creationId xmlns:a16="http://schemas.microsoft.com/office/drawing/2014/main" id="{4772C937-8798-AF7D-20D9-B5A4360859B7}"/>
+            </a:ext>
+          </a:extLst>
+        </p:cNvPr>
         <p:cNvGrpSpPr/>
         <p:nvPr/>
       </p:nvGrpSpPr>
@@ -1294,7 +1276,13 @@
       </p:grpSpPr>
       <p:sp>
         <p:nvSpPr>
-          <p:cNvPr id="2" name="Slide Image Placeholder 1"/>
+          <p:cNvPr id="2" name="Slide Image Placeholder 1">
+            <a:extLst>
+              <a:ext uri="{FF2B5EF4-FFF2-40B4-BE49-F238E27FC236}">
+                <a16:creationId xmlns:a16="http://schemas.microsoft.com/office/drawing/2014/main" id="{6CE6EDA7-86A3-7519-9979-B7AE1EEF1A22}"/>
+              </a:ext>
+            </a:extLst>
+          </p:cNvPr>
           <p:cNvSpPr>
             <a:spLocks noGrp="1" noRot="1" noChangeAspect="1"/>
           </p:cNvSpPr>
@@ -1306,7 +1294,13 @@
       </p:sp>
       <p:sp>
         <p:nvSpPr>
-          <p:cNvPr id="3" name="Notes Placeholder 2"/>
+          <p:cNvPr id="3" name="Notes Placeholder 2">
+            <a:extLst>
+              <a:ext uri="{FF2B5EF4-FFF2-40B4-BE49-F238E27FC236}">
+                <a16:creationId xmlns:a16="http://schemas.microsoft.com/office/drawing/2014/main" id="{6CBA4E99-E0AE-0816-0078-C7251ADB23DB}"/>
+              </a:ext>
+            </a:extLst>
+          </p:cNvPr>
           <p:cNvSpPr>
             <a:spLocks noGrp="1"/>
           </p:cNvSpPr>
@@ -1328,7 +1322,13 @@
       </p:sp>
       <p:sp>
         <p:nvSpPr>
-          <p:cNvPr id="4" name="Slide Number Placeholder 3"/>
+          <p:cNvPr id="4" name="Slide Number Placeholder 3">
+            <a:extLst>
+              <a:ext uri="{FF2B5EF4-FFF2-40B4-BE49-F238E27FC236}">
+                <a16:creationId xmlns:a16="http://schemas.microsoft.com/office/drawing/2014/main" id="{5E17922D-D069-B8C5-207D-0A9865920002}"/>
+              </a:ext>
+            </a:extLst>
+          </p:cNvPr>
           <p:cNvSpPr>
             <a:spLocks noGrp="1"/>
           </p:cNvSpPr>
@@ -1346,6 +1346,11 @@
         </p:txBody>
       </p:sp>
     </p:spTree>
+    <p:extLst>
+      <p:ext uri="{BB962C8B-B14F-4D97-AF65-F5344CB8AC3E}">
+        <p14:creationId xmlns:p14="http://schemas.microsoft.com/office/powerpoint/2010/main" val="1453382025"/>
+      </p:ext>
+    </p:extLst>
   </p:cSld>
   <p:clrMapOvr>
     <a:masterClrMapping/>
@@ -1438,113 +1443,6 @@
         <p:cNvPr id="1" name="">
           <a:extLst>
             <a:ext uri="{FF2B5EF4-FFF2-40B4-BE49-F238E27FC236}">
-              <a16:creationId xmlns:a16="http://schemas.microsoft.com/office/drawing/2014/main" id="{4772C937-8798-AF7D-20D9-B5A4360859B7}"/>
-            </a:ext>
-          </a:extLst>
-        </p:cNvPr>
-        <p:cNvGrpSpPr/>
-        <p:nvPr/>
-      </p:nvGrpSpPr>
-      <p:grpSpPr>
-        <a:xfrm>
-          <a:off x="0" y="0"/>
-          <a:ext cx="0" cy="0"/>
-          <a:chOff x="0" y="0"/>
-          <a:chExt cx="0" cy="0"/>
-        </a:xfrm>
-      </p:grpSpPr>
-      <p:sp>
-        <p:nvSpPr>
-          <p:cNvPr id="2" name="Slide Image Placeholder 1">
-            <a:extLst>
-              <a:ext uri="{FF2B5EF4-FFF2-40B4-BE49-F238E27FC236}">
-                <a16:creationId xmlns:a16="http://schemas.microsoft.com/office/drawing/2014/main" id="{6CE6EDA7-86A3-7519-9979-B7AE1EEF1A22}"/>
-              </a:ext>
-            </a:extLst>
-          </p:cNvPr>
-          <p:cNvSpPr>
-            <a:spLocks noGrp="1" noRot="1" noChangeAspect="1"/>
-          </p:cNvSpPr>
-          <p:nvPr>
-            <p:ph type="sldImg"/>
-          </p:nvPr>
-        </p:nvSpPr>
-        <p:spPr/>
-      </p:sp>
-      <p:sp>
-        <p:nvSpPr>
-          <p:cNvPr id="3" name="Notes Placeholder 2">
-            <a:extLst>
-              <a:ext uri="{FF2B5EF4-FFF2-40B4-BE49-F238E27FC236}">
-                <a16:creationId xmlns:a16="http://schemas.microsoft.com/office/drawing/2014/main" id="{6CBA4E99-E0AE-0816-0078-C7251ADB23DB}"/>
-              </a:ext>
-            </a:extLst>
-          </p:cNvPr>
-          <p:cNvSpPr>
-            <a:spLocks noGrp="1"/>
-          </p:cNvSpPr>
-          <p:nvPr>
-            <p:ph type="body" idx="1"/>
-          </p:nvPr>
-        </p:nvSpPr>
-        <p:spPr/>
-        <p:txBody>
-          <a:bodyPr/>
-          <a:lstStyle/>
-          <a:p>
-            <a:r>
-              <a:rPr dirty="0"/>
-              <a:t>Answer each research question directly. Avoid saying that an indicator affects or drives QQQ. The evidence supports only a weak, sample-specific ranking with no useful aggregate predictive performance.</a:t>
-            </a:r>
-          </a:p>
-        </p:txBody>
-      </p:sp>
-      <p:sp>
-        <p:nvSpPr>
-          <p:cNvPr id="4" name="Slide Number Placeholder 3">
-            <a:extLst>
-              <a:ext uri="{FF2B5EF4-FFF2-40B4-BE49-F238E27FC236}">
-                <a16:creationId xmlns:a16="http://schemas.microsoft.com/office/drawing/2014/main" id="{5E17922D-D069-B8C5-207D-0A9865920002}"/>
-              </a:ext>
-            </a:extLst>
-          </p:cNvPr>
-          <p:cNvSpPr>
-            <a:spLocks noGrp="1"/>
-          </p:cNvSpPr>
-          <p:nvPr>
-            <p:ph type="sldNum" idx="5"/>
-          </p:nvPr>
-        </p:nvSpPr>
-        <p:spPr/>
-        <p:txBody>
-          <a:bodyPr/>
-          <a:lstStyle/>
-          <a:p>
-            <a:endParaRPr/>
-          </a:p>
-        </p:txBody>
-      </p:sp>
-    </p:spTree>
-    <p:extLst>
-      <p:ext uri="{BB962C8B-B14F-4D97-AF65-F5344CB8AC3E}">
-        <p14:creationId xmlns:p14="http://schemas.microsoft.com/office/powerpoint/2010/main" val="1453382025"/>
-      </p:ext>
-    </p:extLst>
-  </p:cSld>
-  <p:clrMapOvr>
-    <a:masterClrMapping/>
-  </p:clrMapOvr>
-</p:notes>
-</file>
-
-<file path=ppt/notesSlides/notesSlide21.xml><?xml version="1.0" encoding="utf-8"?>
-<p:notes xmlns:a="http://schemas.openxmlformats.org/drawingml/2006/main" xmlns:r="http://schemas.openxmlformats.org/officeDocument/2006/relationships" xmlns:p="http://schemas.openxmlformats.org/presentationml/2006/main">
-  <p:cSld>
-    <p:spTree>
-      <p:nvGrpSpPr>
-        <p:cNvPr id="1" name="">
-          <a:extLst>
-            <a:ext uri="{FF2B5EF4-FFF2-40B4-BE49-F238E27FC236}">
               <a16:creationId xmlns:a16="http://schemas.microsoft.com/office/drawing/2014/main" id="{453C750C-74DE-7788-BC69-490F276187A7}"/>
             </a:ext>
           </a:extLst>
@@ -1643,7 +1541,7 @@
 </p:notes>
 </file>
 
-<file path=ppt/notesSlides/notesSlide22.xml><?xml version="1.0" encoding="utf-8"?>
+<file path=ppt/notesSlides/notesSlide21.xml><?xml version="1.0" encoding="utf-8"?>
 <p:notes xmlns:a="http://schemas.openxmlformats.org/drawingml/2006/main" xmlns:r="http://schemas.openxmlformats.org/officeDocument/2006/relationships" xmlns:p="http://schemas.openxmlformats.org/presentationml/2006/main">
   <p:cSld>
     <p:spTree>
@@ -6914,15 +6812,17 @@
 <file path=ppt/slides/slide17.xml><?xml version="1.0" encoding="utf-8"?>
 <p:sld xmlns:a="http://schemas.openxmlformats.org/drawingml/2006/main" xmlns:r="http://schemas.openxmlformats.org/officeDocument/2006/relationships" xmlns:p="http://schemas.openxmlformats.org/presentationml/2006/main">
   <p:cSld>
+    <p:bg>
+      <p:bgPr>
+        <a:solidFill>
+          <a:srgbClr val="FFFFFF"/>
+        </a:solidFill>
+        <a:effectLst/>
+      </p:bgPr>
+    </p:bg>
     <p:spTree>
       <p:nvGrpSpPr>
-        <p:cNvPr id="1" name="">
-          <a:extLst>
-            <a:ext uri="{FF2B5EF4-FFF2-40B4-BE49-F238E27FC236}">
-              <a16:creationId xmlns:a16="http://schemas.microsoft.com/office/drawing/2014/main" id="{EA33C745-EB07-D80D-4204-14E08C182809}"/>
-            </a:ext>
-          </a:extLst>
-        </p:cNvPr>
+        <p:cNvPr id="1" name=""/>
         <p:cNvGrpSpPr/>
         <p:nvPr/>
       </p:nvGrpSpPr>
@@ -6936,10 +6836,10 @@
       </p:grpSpPr>
       <p:sp>
         <p:nvSpPr>
-          <p:cNvPr id="19" name="Rectangle 18">
-            <a:extLst>
-              <a:ext uri="{FF2B5EF4-FFF2-40B4-BE49-F238E27FC236}">
-                <a16:creationId xmlns:a16="http://schemas.microsoft.com/office/drawing/2014/main" id="{712C747B-8FCD-8113-3208-99E56FC7E4D0}"/>
+          <p:cNvPr id="11" name="Rectangle 10">
+            <a:extLst>
+              <a:ext uri="{FF2B5EF4-FFF2-40B4-BE49-F238E27FC236}">
+                <a16:creationId xmlns:a16="http://schemas.microsoft.com/office/drawing/2014/main" id="{E47DA69B-5C9E-4814-97BF-F733C8554638}"/>
               </a:ext>
             </a:extLst>
           </p:cNvPr>
@@ -6982,7 +6882,7 @@
                 </a:solidFill>
                 <a:latin typeface="Helvetica Neue"/>
               </a:rPr>
-              <a:t>Explainable AI: Feature Importance</a:t>
+              <a:t>Results &amp; Discussion</a:t>
             </a:r>
             <a:endParaRPr sz="2550" b="1" dirty="0">
               <a:solidFill>
@@ -7000,7 +6900,7 @@
           <p:cNvPr id="2" name="Rectangle 1">
             <a:extLst>
               <a:ext uri="{FF2B5EF4-FFF2-40B4-BE49-F238E27FC236}">
-                <a16:creationId xmlns:a16="http://schemas.microsoft.com/office/drawing/2014/main" id="{DD12E29C-2077-CFE2-FE55-010B37A12193}"/>
+                <a16:creationId xmlns:a16="http://schemas.microsoft.com/office/drawing/2014/main" id="{9933F48C-41B5-440A-8DD8-DD0D324CB1A0}"/>
               </a:ext>
             </a:extLst>
           </p:cNvPr>
@@ -7045,7 +6945,7 @@
                 <a:ea typeface="Helvetica Neue"/>
                 <a:cs typeface="Helvetica Neue"/>
               </a:rPr>
-              <a:t>7</a:t>
+              <a:t>8</a:t>
             </a:r>
           </a:p>
         </p:txBody>
@@ -7055,7 +6955,7 @@
           <p:cNvPr id="3" name="Rectangle 2">
             <a:extLst>
               <a:ext uri="{FF2B5EF4-FFF2-40B4-BE49-F238E27FC236}">
-                <a16:creationId xmlns:a16="http://schemas.microsoft.com/office/drawing/2014/main" id="{31BDE3B0-D8D7-47AC-B5B5-182B7CD4C81B}"/>
+                <a16:creationId xmlns:a16="http://schemas.microsoft.com/office/drawing/2014/main" id="{621A4F22-3966-4C88-8EF4-A5111465FE71}"/>
               </a:ext>
             </a:extLst>
           </p:cNvPr>
@@ -7089,833 +6989,161 @@
       </p:sp>
       <p:sp>
         <p:nvSpPr>
-          <p:cNvPr id="4" name="Rectangle 3">
-            <a:extLst>
-              <a:ext uri="{FF2B5EF4-FFF2-40B4-BE49-F238E27FC236}">
-                <a16:creationId xmlns:a16="http://schemas.microsoft.com/office/drawing/2014/main" id="{2D7027E7-34F4-57C4-94DE-142AD700F585}"/>
-              </a:ext>
-            </a:extLst>
-          </p:cNvPr>
-          <p:cNvSpPr>
-            <a:spLocks noGrp="1"/>
-          </p:cNvSpPr>
-          <p:nvPr/>
-        </p:nvSpPr>
-        <p:spPr>
-          <a:xfrm>
-            <a:off x="857250" y="1524000"/>
-            <a:ext cx="2952750" cy="428625"/>
+          <p:cNvPr id="4" name="TextBox 3">
+            <a:extLst>
+              <a:ext uri="{FF2B5EF4-FFF2-40B4-BE49-F238E27FC236}">
+                <a16:creationId xmlns:a16="http://schemas.microsoft.com/office/drawing/2014/main" id="{692753CC-43B6-13EB-2EDD-1A1DF0D1D655}"/>
+              </a:ext>
+            </a:extLst>
+          </p:cNvPr>
+          <p:cNvSpPr txBox="1"/>
+          <p:nvPr/>
+        </p:nvSpPr>
+        <p:spPr>
+          <a:xfrm>
+            <a:off x="395927" y="1247775"/>
+            <a:ext cx="11274458" cy="5293757"/>
           </a:xfrm>
           <a:prstGeom prst="rect">
             <a:avLst/>
           </a:prstGeom>
           <a:noFill/>
-          <a:ln w="0">
-            <a:noFill/>
-          </a:ln>
-        </p:spPr>
-        <p:txBody>
-          <a:bodyPr anchor="ctr"/>
-          <a:lstStyle/>
-          <a:p>
-            <a:pPr algn="l">
-              <a:defRPr sz="2100" b="1">
-                <a:solidFill>
-                  <a:srgbClr val="6B7280"/>
-                </a:solidFill>
-                <a:latin typeface="Helvetica Neue"/>
-                <a:ea typeface="Helvetica Neue"/>
-                <a:cs typeface="Helvetica Neue"/>
-              </a:defRPr>
-            </a:pPr>
-            <a:r>
-              <a:rPr sz="2100" b="1">
-                <a:solidFill>
-                  <a:srgbClr val="6B7280"/>
-                </a:solidFill>
-                <a:latin typeface="Helvetica Neue"/>
-                <a:ea typeface="Helvetica Neue"/>
-                <a:cs typeface="Helvetica Neue"/>
-              </a:rPr>
-              <a:t>Majority baseline</a:t>
-            </a:r>
-          </a:p>
-        </p:txBody>
-      </p:sp>
-      <p:sp>
-        <p:nvSpPr>
-          <p:cNvPr id="5" name="Rectangle 4">
-            <a:extLst>
-              <a:ext uri="{FF2B5EF4-FFF2-40B4-BE49-F238E27FC236}">
-                <a16:creationId xmlns:a16="http://schemas.microsoft.com/office/drawing/2014/main" id="{0206BD15-22D2-1FDB-2F87-8B9E4ACE39A9}"/>
-              </a:ext>
-            </a:extLst>
-          </p:cNvPr>
-          <p:cNvSpPr>
-            <a:spLocks noGrp="1"/>
-          </p:cNvSpPr>
-          <p:nvPr/>
-        </p:nvSpPr>
-        <p:spPr>
-          <a:xfrm>
-            <a:off x="857250" y="2047875"/>
-            <a:ext cx="2952750" cy="762000"/>
-          </a:xfrm>
-          <a:prstGeom prst="rect">
-            <a:avLst/>
-          </a:prstGeom>
-          <a:noFill/>
-          <a:ln w="0">
-            <a:noFill/>
-          </a:ln>
-        </p:spPr>
-        <p:txBody>
-          <a:bodyPr anchor="ctr"/>
-          <a:lstStyle/>
-          <a:p>
-            <a:pPr algn="l">
-              <a:defRPr sz="1650" b="0">
-                <a:solidFill>
-                  <a:srgbClr val="1F2933"/>
-                </a:solidFill>
-                <a:latin typeface="Helvetica Neue"/>
-                <a:ea typeface="Helvetica Neue"/>
-                <a:cs typeface="Helvetica Neue"/>
-              </a:defRPr>
-            </a:pPr>
-            <a:r>
-              <a:rPr sz="1650" b="0">
-                <a:solidFill>
-                  <a:srgbClr val="1F2933"/>
-                </a:solidFill>
-                <a:latin typeface="Helvetica Neue"/>
-                <a:ea typeface="Helvetica Neue"/>
-                <a:cs typeface="Helvetica Neue"/>
-              </a:rPr>
-              <a:t>Minimum accuracy reference</a:t>
-            </a:r>
-          </a:p>
-        </p:txBody>
-      </p:sp>
-      <p:sp>
-        <p:nvSpPr>
-          <p:cNvPr id="6" name="Rectangle 5">
-            <a:extLst>
-              <a:ext uri="{FF2B5EF4-FFF2-40B4-BE49-F238E27FC236}">
-                <a16:creationId xmlns:a16="http://schemas.microsoft.com/office/drawing/2014/main" id="{6D29D96C-2274-14DA-B83D-133AFFFF8083}"/>
-              </a:ext>
-            </a:extLst>
-          </p:cNvPr>
-          <p:cNvSpPr>
-            <a:spLocks noGrp="1"/>
-          </p:cNvSpPr>
-          <p:nvPr/>
-        </p:nvSpPr>
-        <p:spPr>
-          <a:xfrm>
-            <a:off x="4619625" y="1524000"/>
-            <a:ext cx="2952750" cy="428625"/>
-          </a:xfrm>
-          <a:prstGeom prst="rect">
-            <a:avLst/>
-          </a:prstGeom>
-          <a:noFill/>
-          <a:ln w="0">
-            <a:noFill/>
-          </a:ln>
-        </p:spPr>
-        <p:txBody>
-          <a:bodyPr anchor="ctr"/>
-          <a:lstStyle/>
-          <a:p>
-            <a:pPr algn="l">
-              <a:defRPr sz="2100" b="1">
-                <a:solidFill>
-                  <a:srgbClr val="219EBC"/>
-                </a:solidFill>
-                <a:latin typeface="Helvetica Neue"/>
-                <a:ea typeface="Helvetica Neue"/>
-                <a:cs typeface="Helvetica Neue"/>
-              </a:defRPr>
-            </a:pPr>
-            <a:r>
-              <a:rPr sz="2100" b="1">
-                <a:solidFill>
-                  <a:srgbClr val="219EBC"/>
-                </a:solidFill>
-                <a:latin typeface="Helvetica Neue"/>
-                <a:ea typeface="Helvetica Neue"/>
-                <a:cs typeface="Helvetica Neue"/>
-              </a:rPr>
-              <a:t>Logistic regression</a:t>
-            </a:r>
-          </a:p>
-        </p:txBody>
-      </p:sp>
-      <p:sp>
-        <p:nvSpPr>
-          <p:cNvPr id="7" name="Rectangle 6">
-            <a:extLst>
-              <a:ext uri="{FF2B5EF4-FFF2-40B4-BE49-F238E27FC236}">
-                <a16:creationId xmlns:a16="http://schemas.microsoft.com/office/drawing/2014/main" id="{62DA7365-0735-31E9-25A6-FD42AACC8BC2}"/>
-              </a:ext>
-            </a:extLst>
-          </p:cNvPr>
-          <p:cNvSpPr>
-            <a:spLocks noGrp="1"/>
-          </p:cNvSpPr>
-          <p:nvPr/>
-        </p:nvSpPr>
-        <p:spPr>
-          <a:xfrm>
-            <a:off x="4619625" y="2047875"/>
-            <a:ext cx="2952750" cy="762000"/>
-          </a:xfrm>
-          <a:prstGeom prst="rect">
-            <a:avLst/>
-          </a:prstGeom>
-          <a:noFill/>
-          <a:ln w="0">
-            <a:noFill/>
-          </a:ln>
-        </p:spPr>
-        <p:txBody>
-          <a:bodyPr anchor="ctr"/>
-          <a:lstStyle/>
-          <a:p>
-            <a:pPr algn="l">
-              <a:defRPr sz="1650" b="0">
-                <a:solidFill>
-                  <a:srgbClr val="1F2933"/>
-                </a:solidFill>
-                <a:latin typeface="Helvetica Neue"/>
-                <a:ea typeface="Helvetica Neue"/>
-                <a:cs typeface="Helvetica Neue"/>
-              </a:defRPr>
-            </a:pPr>
-            <a:r>
-              <a:rPr sz="1650" b="0">
-                <a:solidFill>
-                  <a:srgbClr val="1F2933"/>
-                </a:solidFill>
-                <a:latin typeface="Helvetica Neue"/>
-                <a:ea typeface="Helvetica Neue"/>
-                <a:cs typeface="Helvetica Neue"/>
-              </a:rPr>
-              <a:t>Linear baseline with scaling</a:t>
-            </a:r>
-          </a:p>
-        </p:txBody>
-      </p:sp>
-      <p:sp>
-        <p:nvSpPr>
-          <p:cNvPr id="8" name="Rectangle 7">
-            <a:extLst>
-              <a:ext uri="{FF2B5EF4-FFF2-40B4-BE49-F238E27FC236}">
-                <a16:creationId xmlns:a16="http://schemas.microsoft.com/office/drawing/2014/main" id="{135BFFC9-DE86-29BD-EE36-335BF59B6320}"/>
-              </a:ext>
-            </a:extLst>
-          </p:cNvPr>
-          <p:cNvSpPr>
-            <a:spLocks noGrp="1"/>
-          </p:cNvSpPr>
-          <p:nvPr/>
-        </p:nvSpPr>
-        <p:spPr>
-          <a:xfrm>
-            <a:off x="8382000" y="1524000"/>
-            <a:ext cx="2952750" cy="428625"/>
-          </a:xfrm>
-          <a:prstGeom prst="rect">
-            <a:avLst/>
-          </a:prstGeom>
-          <a:noFill/>
-          <a:ln w="0">
-            <a:noFill/>
-          </a:ln>
-        </p:spPr>
-        <p:txBody>
-          <a:bodyPr anchor="ctr"/>
-          <a:lstStyle/>
-          <a:p>
-            <a:pPr algn="l">
-              <a:defRPr sz="2100" b="1">
-                <a:solidFill>
-                  <a:srgbClr val="2F80ED"/>
-                </a:solidFill>
-                <a:latin typeface="Helvetica Neue"/>
-                <a:ea typeface="Helvetica Neue"/>
-                <a:cs typeface="Helvetica Neue"/>
-              </a:defRPr>
-            </a:pPr>
-            <a:r>
-              <a:rPr sz="2100" b="1">
-                <a:solidFill>
-                  <a:srgbClr val="2F80ED"/>
-                </a:solidFill>
-                <a:latin typeface="Helvetica Neue"/>
-                <a:ea typeface="Helvetica Neue"/>
-                <a:cs typeface="Helvetica Neue"/>
-              </a:rPr>
-              <a:t>Random Forest</a:t>
-            </a:r>
-          </a:p>
-        </p:txBody>
-      </p:sp>
-      <p:sp>
-        <p:nvSpPr>
-          <p:cNvPr id="9" name="Rectangle 8">
-            <a:extLst>
-              <a:ext uri="{FF2B5EF4-FFF2-40B4-BE49-F238E27FC236}">
-                <a16:creationId xmlns:a16="http://schemas.microsoft.com/office/drawing/2014/main" id="{6294237E-B1CF-B803-E5A3-C17C8C6578A6}"/>
-              </a:ext>
-            </a:extLst>
-          </p:cNvPr>
-          <p:cNvSpPr>
-            <a:spLocks noGrp="1"/>
-          </p:cNvSpPr>
-          <p:nvPr/>
-        </p:nvSpPr>
-        <p:spPr>
-          <a:xfrm>
-            <a:off x="8382000" y="2047875"/>
-            <a:ext cx="2952750" cy="952500"/>
-          </a:xfrm>
-          <a:prstGeom prst="rect">
-            <a:avLst/>
-          </a:prstGeom>
-          <a:noFill/>
-          <a:ln w="0">
-            <a:noFill/>
-          </a:ln>
-        </p:spPr>
-        <p:txBody>
-          <a:bodyPr anchor="ctr"/>
-          <a:lstStyle/>
-          <a:p>
-            <a:pPr algn="l">
-              <a:defRPr sz="1650" b="0">
-                <a:solidFill>
-                  <a:srgbClr val="1F2933"/>
-                </a:solidFill>
-                <a:latin typeface="Helvetica Neue"/>
-                <a:ea typeface="Helvetica Neue"/>
-                <a:cs typeface="Helvetica Neue"/>
-              </a:defRPr>
-            </a:pPr>
-            <a:r>
-              <a:rPr sz="1650" b="0">
-                <a:solidFill>
-                  <a:srgbClr val="1F2933"/>
-                </a:solidFill>
-                <a:latin typeface="Helvetica Neue"/>
-                <a:ea typeface="Helvetica Neue"/>
-                <a:cs typeface="Helvetica Neue"/>
-              </a:rPr>
-              <a:t>Nonlinear model with constrained depth and leaf size</a:t>
-            </a:r>
-          </a:p>
-        </p:txBody>
-      </p:sp>
-      <p:sp>
-        <p:nvSpPr>
-          <p:cNvPr id="10" name="Rectangle 9">
-            <a:extLst>
-              <a:ext uri="{FF2B5EF4-FFF2-40B4-BE49-F238E27FC236}">
-                <a16:creationId xmlns:a16="http://schemas.microsoft.com/office/drawing/2014/main" id="{1C04839C-CEDF-6533-E904-54617CF2E0BE}"/>
-              </a:ext>
-            </a:extLst>
-          </p:cNvPr>
-          <p:cNvSpPr>
-            <a:spLocks noGrp="1"/>
-          </p:cNvSpPr>
-          <p:nvPr/>
-        </p:nvSpPr>
-        <p:spPr>
-          <a:xfrm>
-            <a:off x="857250" y="3714750"/>
-            <a:ext cx="2381250" cy="419100"/>
-          </a:xfrm>
-          <a:prstGeom prst="rect">
-            <a:avLst/>
-          </a:prstGeom>
-          <a:noFill/>
-          <a:ln w="0">
-            <a:noFill/>
-          </a:ln>
-        </p:spPr>
-        <p:txBody>
-          <a:bodyPr anchor="ctr"/>
-          <a:lstStyle/>
-          <a:p>
-            <a:pPr algn="l">
-              <a:defRPr sz="2100" b="1">
-                <a:solidFill>
-                  <a:srgbClr val="16324F"/>
-                </a:solidFill>
-                <a:latin typeface="Helvetica Neue"/>
-                <a:ea typeface="Helvetica Neue"/>
-                <a:cs typeface="Helvetica Neue"/>
-              </a:defRPr>
-            </a:pPr>
-            <a:r>
-              <a:rPr sz="2100" b="1">
-                <a:solidFill>
-                  <a:srgbClr val="16324F"/>
-                </a:solidFill>
-                <a:latin typeface="Helvetica Neue"/>
-                <a:ea typeface="Helvetica Neue"/>
-                <a:cs typeface="Helvetica Neue"/>
-              </a:rPr>
-              <a:t>Validation</a:t>
-            </a:r>
-          </a:p>
-        </p:txBody>
-      </p:sp>
-      <p:sp>
-        <p:nvSpPr>
-          <p:cNvPr id="11" name="Rectangle 10">
-            <a:extLst>
-              <a:ext uri="{FF2B5EF4-FFF2-40B4-BE49-F238E27FC236}">
-                <a16:creationId xmlns:a16="http://schemas.microsoft.com/office/drawing/2014/main" id="{0B76ABB5-C1A5-CEFD-FE3A-AF787D1C8103}"/>
-              </a:ext>
-            </a:extLst>
-          </p:cNvPr>
-          <p:cNvSpPr>
-            <a:spLocks noGrp="1"/>
-          </p:cNvSpPr>
-          <p:nvPr/>
-        </p:nvSpPr>
-        <p:spPr>
-          <a:xfrm>
-            <a:off x="857250" y="4286250"/>
-            <a:ext cx="228600" cy="381000"/>
-          </a:xfrm>
-          <a:prstGeom prst="rect">
-            <a:avLst/>
-          </a:prstGeom>
-          <a:noFill/>
-          <a:ln w="0">
-            <a:noFill/>
-          </a:ln>
-        </p:spPr>
-        <p:txBody>
-          <a:bodyPr anchor="ctr"/>
-          <a:lstStyle/>
-          <a:p>
-            <a:pPr algn="l">
-              <a:defRPr sz="1650" b="1">
-                <a:solidFill>
-                  <a:srgbClr val="2F80ED"/>
-                </a:solidFill>
-                <a:latin typeface="Helvetica Neue"/>
-                <a:ea typeface="Helvetica Neue"/>
-                <a:cs typeface="Helvetica Neue"/>
-              </a:defRPr>
-            </a:pPr>
-            <a:r>
-              <a:rPr sz="1650" b="1">
-                <a:solidFill>
-                  <a:srgbClr val="2F80ED"/>
-                </a:solidFill>
-                <a:latin typeface="Helvetica Neue"/>
-                <a:ea typeface="Helvetica Neue"/>
-                <a:cs typeface="Helvetica Neue"/>
-              </a:rPr>
-              <a:t>•</a:t>
-            </a:r>
-          </a:p>
-        </p:txBody>
-      </p:sp>
-      <p:sp>
-        <p:nvSpPr>
-          <p:cNvPr id="12" name="Rectangle 11">
-            <a:extLst>
-              <a:ext uri="{FF2B5EF4-FFF2-40B4-BE49-F238E27FC236}">
-                <a16:creationId xmlns:a16="http://schemas.microsoft.com/office/drawing/2014/main" id="{140AA4A7-CF14-0696-D3B2-202A9FA2D09B}"/>
-              </a:ext>
-            </a:extLst>
-          </p:cNvPr>
-          <p:cNvSpPr>
-            <a:spLocks noGrp="1"/>
-          </p:cNvSpPr>
-          <p:nvPr/>
-        </p:nvSpPr>
-        <p:spPr>
-          <a:xfrm>
-            <a:off x="1181100" y="4286250"/>
-            <a:ext cx="9201150" cy="457200"/>
-          </a:xfrm>
-          <a:prstGeom prst="rect">
-            <a:avLst/>
-          </a:prstGeom>
-          <a:noFill/>
-          <a:ln w="0">
-            <a:noFill/>
-          </a:ln>
-        </p:spPr>
-        <p:txBody>
-          <a:bodyPr anchor="ctr"/>
-          <a:lstStyle/>
-          <a:p>
-            <a:pPr algn="l">
-              <a:defRPr sz="1650" b="0">
-                <a:solidFill>
-                  <a:srgbClr val="1F2933"/>
-                </a:solidFill>
-                <a:latin typeface="Helvetica Neue"/>
-                <a:ea typeface="Helvetica Neue"/>
-                <a:cs typeface="Helvetica Neue"/>
-              </a:defRPr>
-            </a:pPr>
-            <a:r>
-              <a:rPr sz="1650" b="0">
-                <a:solidFill>
-                  <a:srgbClr val="1F2933"/>
-                </a:solidFill>
-                <a:latin typeface="Helvetica Neue"/>
-                <a:ea typeface="Helvetica Neue"/>
-                <a:cs typeface="Helvetica Neue"/>
-              </a:rPr>
-              <a:t>Newest 20% held out</a:t>
-            </a:r>
-          </a:p>
-        </p:txBody>
-      </p:sp>
-      <p:sp>
-        <p:nvSpPr>
-          <p:cNvPr id="13" name="Rectangle 12">
-            <a:extLst>
-              <a:ext uri="{FF2B5EF4-FFF2-40B4-BE49-F238E27FC236}">
-                <a16:creationId xmlns:a16="http://schemas.microsoft.com/office/drawing/2014/main" id="{0060191E-4795-A8C8-929A-E89F04D2D999}"/>
-              </a:ext>
-            </a:extLst>
-          </p:cNvPr>
-          <p:cNvSpPr>
-            <a:spLocks noGrp="1"/>
-          </p:cNvSpPr>
-          <p:nvPr/>
-        </p:nvSpPr>
-        <p:spPr>
-          <a:xfrm>
-            <a:off x="857250" y="4781550"/>
-            <a:ext cx="228600" cy="381000"/>
-          </a:xfrm>
-          <a:prstGeom prst="rect">
-            <a:avLst/>
-          </a:prstGeom>
-          <a:noFill/>
-          <a:ln w="0">
-            <a:noFill/>
-          </a:ln>
-        </p:spPr>
-        <p:txBody>
-          <a:bodyPr anchor="ctr"/>
-          <a:lstStyle/>
-          <a:p>
-            <a:pPr algn="l">
-              <a:defRPr sz="1650" b="1">
-                <a:solidFill>
-                  <a:srgbClr val="2F80ED"/>
-                </a:solidFill>
-                <a:latin typeface="Helvetica Neue"/>
-                <a:ea typeface="Helvetica Neue"/>
-                <a:cs typeface="Helvetica Neue"/>
-              </a:defRPr>
-            </a:pPr>
-            <a:r>
-              <a:rPr sz="1650" b="1">
-                <a:solidFill>
-                  <a:srgbClr val="2F80ED"/>
-                </a:solidFill>
-                <a:latin typeface="Helvetica Neue"/>
-                <a:ea typeface="Helvetica Neue"/>
-                <a:cs typeface="Helvetica Neue"/>
-              </a:rPr>
-              <a:t>•</a:t>
-            </a:r>
-          </a:p>
-        </p:txBody>
-      </p:sp>
-      <p:sp>
-        <p:nvSpPr>
-          <p:cNvPr id="14" name="Rectangle 13">
-            <a:extLst>
-              <a:ext uri="{FF2B5EF4-FFF2-40B4-BE49-F238E27FC236}">
-                <a16:creationId xmlns:a16="http://schemas.microsoft.com/office/drawing/2014/main" id="{E82B9625-B71C-5B93-55CD-4367268E713D}"/>
-              </a:ext>
-            </a:extLst>
-          </p:cNvPr>
-          <p:cNvSpPr>
-            <a:spLocks noGrp="1"/>
-          </p:cNvSpPr>
-          <p:nvPr/>
-        </p:nvSpPr>
-        <p:spPr>
-          <a:xfrm>
-            <a:off x="1181100" y="4781550"/>
-            <a:ext cx="9201150" cy="457200"/>
-          </a:xfrm>
-          <a:prstGeom prst="rect">
-            <a:avLst/>
-          </a:prstGeom>
-          <a:noFill/>
-          <a:ln w="0">
-            <a:noFill/>
-          </a:ln>
-        </p:spPr>
-        <p:txBody>
-          <a:bodyPr anchor="ctr"/>
-          <a:lstStyle/>
-          <a:p>
-            <a:pPr algn="l">
-              <a:defRPr sz="1650" b="0">
-                <a:solidFill>
-                  <a:srgbClr val="1F2933"/>
-                </a:solidFill>
-                <a:latin typeface="Helvetica Neue"/>
-                <a:ea typeface="Helvetica Neue"/>
-                <a:cs typeface="Helvetica Neue"/>
-              </a:defRPr>
-            </a:pPr>
-            <a:r>
-              <a:rPr sz="1650" b="0">
-                <a:solidFill>
-                  <a:srgbClr val="1F2933"/>
-                </a:solidFill>
-                <a:latin typeface="Helvetica Neue"/>
-                <a:ea typeface="Helvetica Neue"/>
-                <a:cs typeface="Helvetica Neue"/>
-              </a:rPr>
-              <a:t>Five expanding time-series folds</a:t>
-            </a:r>
-          </a:p>
-        </p:txBody>
-      </p:sp>
-      <p:sp>
-        <p:nvSpPr>
-          <p:cNvPr id="15" name="Rectangle 14">
-            <a:extLst>
-              <a:ext uri="{FF2B5EF4-FFF2-40B4-BE49-F238E27FC236}">
-                <a16:creationId xmlns:a16="http://schemas.microsoft.com/office/drawing/2014/main" id="{BE663431-39AF-4D06-3DC8-C1475413CF86}"/>
-              </a:ext>
-            </a:extLst>
-          </p:cNvPr>
-          <p:cNvSpPr>
-            <a:spLocks noGrp="1"/>
-          </p:cNvSpPr>
-          <p:nvPr/>
-        </p:nvSpPr>
-        <p:spPr>
-          <a:xfrm>
-            <a:off x="857250" y="5276850"/>
-            <a:ext cx="228600" cy="381000"/>
-          </a:xfrm>
-          <a:prstGeom prst="rect">
-            <a:avLst/>
-          </a:prstGeom>
-          <a:noFill/>
-          <a:ln w="0">
-            <a:noFill/>
-          </a:ln>
-        </p:spPr>
-        <p:txBody>
-          <a:bodyPr anchor="ctr"/>
-          <a:lstStyle/>
-          <a:p>
-            <a:pPr algn="l">
-              <a:defRPr sz="1650" b="1">
-                <a:solidFill>
-                  <a:srgbClr val="2F80ED"/>
-                </a:solidFill>
-                <a:latin typeface="Helvetica Neue"/>
-                <a:ea typeface="Helvetica Neue"/>
-                <a:cs typeface="Helvetica Neue"/>
-              </a:defRPr>
-            </a:pPr>
-            <a:r>
-              <a:rPr sz="1650" b="1">
-                <a:solidFill>
-                  <a:srgbClr val="2F80ED"/>
-                </a:solidFill>
-                <a:latin typeface="Helvetica Neue"/>
-                <a:ea typeface="Helvetica Neue"/>
-                <a:cs typeface="Helvetica Neue"/>
-              </a:rPr>
-              <a:t>•</a:t>
-            </a:r>
-          </a:p>
-        </p:txBody>
-      </p:sp>
-      <p:sp>
-        <p:nvSpPr>
-          <p:cNvPr id="16" name="Rectangle 15">
-            <a:extLst>
-              <a:ext uri="{FF2B5EF4-FFF2-40B4-BE49-F238E27FC236}">
-                <a16:creationId xmlns:a16="http://schemas.microsoft.com/office/drawing/2014/main" id="{2A1F3979-9EB2-ACE9-517F-79EC6DD7E1C8}"/>
-              </a:ext>
-            </a:extLst>
-          </p:cNvPr>
-          <p:cNvSpPr>
-            <a:spLocks noGrp="1"/>
-          </p:cNvSpPr>
-          <p:nvPr/>
-        </p:nvSpPr>
-        <p:spPr>
-          <a:xfrm>
-            <a:off x="1181100" y="5276850"/>
-            <a:ext cx="9201150" cy="457200"/>
-          </a:xfrm>
-          <a:prstGeom prst="rect">
-            <a:avLst/>
-          </a:prstGeom>
-          <a:noFill/>
-          <a:ln w="0">
-            <a:noFill/>
-          </a:ln>
-        </p:spPr>
-        <p:txBody>
-          <a:bodyPr anchor="ctr"/>
-          <a:lstStyle/>
-          <a:p>
-            <a:pPr algn="l">
-              <a:defRPr sz="1650" b="0">
-                <a:solidFill>
-                  <a:srgbClr val="1F2933"/>
-                </a:solidFill>
-                <a:latin typeface="Helvetica Neue"/>
-                <a:ea typeface="Helvetica Neue"/>
-                <a:cs typeface="Helvetica Neue"/>
-              </a:defRPr>
-            </a:pPr>
-            <a:r>
-              <a:rPr sz="1650" b="0">
-                <a:solidFill>
-                  <a:srgbClr val="1F2933"/>
-                </a:solidFill>
-                <a:latin typeface="Helvetica Neue"/>
-                <a:ea typeface="Helvetica Neue"/>
-                <a:cs typeface="Helvetica Neue"/>
-              </a:rPr>
-              <a:t>Balanced accuracy is primary</a:t>
-            </a:r>
-          </a:p>
-        </p:txBody>
-      </p:sp>
-      <p:sp>
-        <p:nvSpPr>
-          <p:cNvPr id="17" name="Rectangle 16">
-            <a:extLst>
-              <a:ext uri="{FF2B5EF4-FFF2-40B4-BE49-F238E27FC236}">
-                <a16:creationId xmlns:a16="http://schemas.microsoft.com/office/drawing/2014/main" id="{27B93F7B-4539-2F0D-D5D1-C5E4D7B8B2AB}"/>
-              </a:ext>
-            </a:extLst>
-          </p:cNvPr>
-          <p:cNvSpPr>
-            <a:spLocks noGrp="1"/>
-          </p:cNvSpPr>
-          <p:nvPr/>
-        </p:nvSpPr>
-        <p:spPr>
-          <a:xfrm>
-            <a:off x="857250" y="5772150"/>
-            <a:ext cx="228600" cy="381000"/>
-          </a:xfrm>
-          <a:prstGeom prst="rect">
-            <a:avLst/>
-          </a:prstGeom>
-          <a:noFill/>
-          <a:ln w="0">
-            <a:noFill/>
-          </a:ln>
-        </p:spPr>
-        <p:txBody>
-          <a:bodyPr anchor="ctr"/>
-          <a:lstStyle/>
-          <a:p>
-            <a:pPr algn="l">
-              <a:defRPr sz="1650" b="1">
-                <a:solidFill>
-                  <a:srgbClr val="2F80ED"/>
-                </a:solidFill>
-                <a:latin typeface="Helvetica Neue"/>
-                <a:ea typeface="Helvetica Neue"/>
-                <a:cs typeface="Helvetica Neue"/>
-              </a:defRPr>
-            </a:pPr>
-            <a:r>
-              <a:rPr sz="1650" b="1">
-                <a:solidFill>
-                  <a:srgbClr val="2F80ED"/>
-                </a:solidFill>
-                <a:latin typeface="Helvetica Neue"/>
-                <a:ea typeface="Helvetica Neue"/>
-                <a:cs typeface="Helvetica Neue"/>
-              </a:rPr>
-              <a:t>•</a:t>
-            </a:r>
-          </a:p>
-        </p:txBody>
-      </p:sp>
-      <p:sp>
-        <p:nvSpPr>
-          <p:cNvPr id="18" name="Rectangle 17">
-            <a:extLst>
-              <a:ext uri="{FF2B5EF4-FFF2-40B4-BE49-F238E27FC236}">
-                <a16:creationId xmlns:a16="http://schemas.microsoft.com/office/drawing/2014/main" id="{9AB03F3D-A4FD-A4A6-2ACD-0D802B706128}"/>
-              </a:ext>
-            </a:extLst>
-          </p:cNvPr>
-          <p:cNvSpPr>
-            <a:spLocks noGrp="1"/>
-          </p:cNvSpPr>
-          <p:nvPr/>
-        </p:nvSpPr>
-        <p:spPr>
-          <a:xfrm>
-            <a:off x="1181100" y="5772150"/>
-            <a:ext cx="9201150" cy="457200"/>
-          </a:xfrm>
-          <a:prstGeom prst="rect">
-            <a:avLst/>
-          </a:prstGeom>
-          <a:noFill/>
-          <a:ln w="0">
-            <a:noFill/>
-          </a:ln>
-        </p:spPr>
-        <p:txBody>
-          <a:bodyPr anchor="ctr"/>
-          <a:lstStyle/>
-          <a:p>
-            <a:pPr algn="l">
-              <a:defRPr sz="1650" b="0">
-                <a:solidFill>
-                  <a:srgbClr val="1F2933"/>
-                </a:solidFill>
-                <a:latin typeface="Helvetica Neue"/>
-                <a:ea typeface="Helvetica Neue"/>
-                <a:cs typeface="Helvetica Neue"/>
-              </a:defRPr>
-            </a:pPr>
-            <a:r>
-              <a:rPr sz="1650" b="0">
-                <a:solidFill>
-                  <a:srgbClr val="1F2933"/>
-                </a:solidFill>
-                <a:latin typeface="Helvetica Neue"/>
-                <a:ea typeface="Helvetica Neue"/>
-                <a:cs typeface="Helvetica Neue"/>
-              </a:rPr>
-              <a:t>Accuracy, F1, and ROC AUC are secondary</a:t>
-            </a:r>
+        </p:spPr>
+        <p:txBody>
+          <a:bodyPr wrap="square" rtlCol="0">
+            <a:spAutoFit/>
+          </a:bodyPr>
+          <a:lstStyle/>
+          <a:p>
+            <a:pPr lvl="0"/>
+            <a:r>
+              <a:rPr lang="en-TH" sz="1600" dirty="0"/>
+              <a:t>ภาพลวงตาของความแม่นยำ (The Accuracy Illusion)</a:t>
+            </a:r>
+          </a:p>
+          <a:p>
+            <a:pPr lvl="0"/>
+            <a:br>
+              <a:rPr lang="en-TH" sz="1400" dirty="0"/>
+            </a:br>
+            <a:r>
+              <a:rPr lang="en-TH" sz="1400" dirty="0"/>
+              <a:t>สิ่งที่พบ โมเดลพื้นฐาน (Majority Baseline) ที่หลับตาเดาว่าตลาดจะ "ขึ้น" ทุกวัน สามารถทำ Raw Accuracy ได้สูงถึง 54.77% แต่มีค่า Balanced Accuracy และ ROC AUC เพียง 0.50 (ไม่ต่างจากการทอยเหรียญ)</a:t>
+            </a:r>
+          </a:p>
+          <a:p>
+            <a:pPr lvl="0"/>
+            <a:r>
+              <a:rPr lang="en-TH" sz="1400" dirty="0"/>
+              <a:t>Insight ในตลาดที่เอนเอียงไปทางขาขึ้น (Imbalanced class) การดูแค่ค่า Accuracy นั้นอันตรายและหลอกตา โมเดลที่ใช้งานได้จริงต้องวัดผลด้วย ROC AUC และ Balanced Accuracy</a:t>
+            </a:r>
+            <a:br>
+              <a:rPr lang="en-TH" sz="1400" dirty="0"/>
+            </a:br>
+            <a:endParaRPr lang="en-TH" sz="1400" dirty="0"/>
+          </a:p>
+          <a:p>
+            <a:pPr lvl="0"/>
+            <a:r>
+              <a:rPr lang="en-TH" sz="1400" dirty="0"/>
+              <a:t>2. โมเดลที่ดีที่สุด (The Champion Model: Gradient Boosting)</a:t>
+            </a:r>
+            <a:br>
+              <a:rPr lang="en-TH" sz="1400" dirty="0"/>
+            </a:br>
+            <a:r>
+              <a:rPr lang="en-TH" sz="1400" dirty="0"/>
+              <a:t>สิ่งที่พบ: การทำนายตลาดล่วงหน้า 1 วันเป็นเรื่องยากมาก (โมเดลส่วนใหญ่ ROC AUC เกาะกลุ่มที่ 0.50) แต่ Gradient Boosting ทำผลงานได้ดีที่สุด โดยมีค่า Balanced Accuracy = 52.74% และ ROC AUC = 0.526</a:t>
+            </a:r>
+            <a:br>
+              <a:rPr lang="en-TH" sz="1400" dirty="0"/>
+            </a:br>
+            <a:endParaRPr lang="en-TH" sz="1400" dirty="0"/>
+          </a:p>
+          <a:p>
+            <a:pPr lvl="0"/>
+            <a:r>
+              <a:rPr lang="en-TH" sz="1400" dirty="0"/>
+              <a:t>Insight: แม้ความแม่นยำดิบ (53.00%) จะน้อยกว่า Baseline แต่ Gradient Boosting มี "ทักษะการทำนาย (Predictive Skill)" ที่แท้จริง เพราะเรียนรู้ที่จะแยกแยะและดักจับได้ทั้งจังหวะตลาด "ขาขึ้น" และ "ขาลง"</a:t>
+            </a:r>
+            <a:br>
+              <a:rPr lang="en-TH" sz="1400" dirty="0"/>
+            </a:br>
+            <a:endParaRPr lang="en-TH" sz="1400" dirty="0"/>
+          </a:p>
+          <a:p>
+            <a:pPr lvl="0"/>
+            <a:r>
+              <a:rPr lang="en-TH" sz="1400" dirty="0"/>
+              <a:t>3. ปัจจัยหลักที่ใช้ทำนายตลาดระยะสั้น (Volatility &amp; Momentum Rule)</a:t>
+            </a:r>
+            <a:br>
+              <a:rPr lang="en-TH" sz="1400" dirty="0"/>
+            </a:br>
+            <a:r>
+              <a:rPr lang="en-TH" sz="1400" dirty="0"/>
+              <a:t>สิ่งที่พบ: จากการวิเคราะห์ Feature Importance ตัวแปรกลุ่ม ความผันผวน (Volatility) และ โมเมนตัม (Momentum) คือปัจจัยที่มีอิทธิพลต่อโมเดลมากที่สุด</a:t>
+            </a:r>
+            <a:br>
+              <a:rPr lang="en-TH" sz="1400" dirty="0"/>
+            </a:br>
+            <a:endParaRPr lang="en-TH" sz="1400" dirty="0"/>
+          </a:p>
+          <a:p>
+            <a:pPr lvl="0"/>
+            <a:r>
+              <a:rPr lang="en-TH" sz="1400" dirty="0"/>
+              <a:t>Top 3 Features</a:t>
+            </a:r>
+            <a:br>
+              <a:rPr lang="en-TH" sz="1400" dirty="0"/>
+            </a:br>
+            <a:r>
+              <a:rPr lang="en-TH" sz="1400" dirty="0"/>
+              <a:t>1. atr_14_pct (Average True Range - ความผันผวน)</a:t>
+            </a:r>
+            <a:br>
+              <a:rPr lang="en-TH" sz="1400" dirty="0"/>
+            </a:br>
+            <a:r>
+              <a:rPr lang="en-TH" sz="1400" dirty="0"/>
+              <a:t>2. rsi_14 (โมเมนตัม)</a:t>
+            </a:r>
+            <a:br>
+              <a:rPr lang="en-TH" sz="1400" dirty="0"/>
+            </a:br>
+            <a:r>
+              <a:rPr lang="en-TH" sz="1400" dirty="0"/>
+              <a:t>3. roc_10 (โมเมนตัม)</a:t>
+            </a:r>
+            <a:br>
+              <a:rPr lang="en-TH" sz="1400" dirty="0"/>
+            </a:br>
+            <a:endParaRPr lang="en-TH" sz="1400" dirty="0"/>
+          </a:p>
+          <a:p>
+            <a:pPr lvl="0"/>
+            <a:r>
+              <a:rPr lang="en-TH" sz="1400" dirty="0"/>
+              <a:t>Insight </a:t>
+            </a:r>
+          </a:p>
+          <a:p>
+            <a:pPr lvl="0"/>
+            <a:r>
+              <a:rPr lang="en-TH" sz="1400" dirty="0"/>
+              <a:t>สำหรับการทำนายระยะสั้นเพียง 1 วัน ตัวชี้วัดกลุ่มแนวโน้ม (Trend) และปริมาณการซื้อขาย (Volume) แทบจะไม่มีประโยชน์และให้ข้อมูลที่ช้าเกินไป (Lagging)</a:t>
+            </a:r>
+          </a:p>
+          <a:p>
+            <a:endParaRPr lang="en-TH" sz="1400" dirty="0"/>
           </a:p>
         </p:txBody>
       </p:sp>
     </p:spTree>
     <p:extLst>
       <p:ext uri="{BB962C8B-B14F-4D97-AF65-F5344CB8AC3E}">
-        <p14:creationId xmlns:p14="http://schemas.microsoft.com/office/powerpoint/2010/main" val="2315075093"/>
+        <p14:creationId xmlns:p14="http://schemas.microsoft.com/office/powerpoint/2010/main" val="336995676"/>
       </p:ext>
     </p:extLst>
   </p:cSld>
@@ -7955,7 +7183,7 @@
           <p:cNvPr id="11" name="Rectangle 10">
             <a:extLst>
               <a:ext uri="{FF2B5EF4-FFF2-40B4-BE49-F238E27FC236}">
-                <a16:creationId xmlns:a16="http://schemas.microsoft.com/office/drawing/2014/main" id="{E47DA69B-5C9E-4814-97BF-F733C8554638}"/>
+                <a16:creationId xmlns:a16="http://schemas.microsoft.com/office/drawing/2014/main" id="{E2B0BADA-902F-4436-B445-0E75100F2514}"/>
               </a:ext>
             </a:extLst>
           </p:cNvPr>
@@ -7992,22 +7220,27 @@
               </a:defRPr>
             </a:pPr>
             <a:r>
-              <a:rPr lang="en-TH" sz="2550" b="1" dirty="0">
+              <a:rPr lang="en-US" sz="2550" b="1" dirty="0">
                 <a:solidFill>
                   <a:srgbClr val="16324F"/>
                 </a:solidFill>
                 <a:latin typeface="Helvetica Neue"/>
+                <a:ea typeface="Helvetica Neue"/>
+                <a:cs typeface="Helvetica Neue"/>
               </a:rPr>
-              <a:t>Results &amp; Discussion</a:t>
-            </a:r>
-            <a:endParaRPr sz="2550" b="1" dirty="0">
-              <a:solidFill>
-                <a:srgbClr val="16324F"/>
-              </a:solidFill>
-              <a:latin typeface="Helvetica Neue"/>
-              <a:ea typeface="Helvetica Neue"/>
-              <a:cs typeface="Helvetica Neue"/>
-            </a:endParaRPr>
+              <a:t>Insights: </a:t>
+            </a:r>
+            <a:r>
+              <a:rPr sz="2550" b="1" dirty="0">
+                <a:solidFill>
+                  <a:srgbClr val="16324F"/>
+                </a:solidFill>
+                <a:latin typeface="Helvetica Neue"/>
+                <a:ea typeface="Helvetica Neue"/>
+                <a:cs typeface="Helvetica Neue"/>
+              </a:rPr>
+              <a:t>Answers to the research questions</a:t>
+            </a:r>
           </a:p>
         </p:txBody>
       </p:sp>
@@ -8016,7 +7249,7 @@
           <p:cNvPr id="2" name="Rectangle 1">
             <a:extLst>
               <a:ext uri="{FF2B5EF4-FFF2-40B4-BE49-F238E27FC236}">
-                <a16:creationId xmlns:a16="http://schemas.microsoft.com/office/drawing/2014/main" id="{9933F48C-41B5-440A-8DD8-DD0D324CB1A0}"/>
+                <a16:creationId xmlns:a16="http://schemas.microsoft.com/office/drawing/2014/main" id="{2F679DA9-CC46-4CC5-9BC6-106A89979AC3}"/>
               </a:ext>
             </a:extLst>
           </p:cNvPr>
@@ -8061,7 +7294,7 @@
                 <a:ea typeface="Helvetica Neue"/>
                 <a:cs typeface="Helvetica Neue"/>
               </a:rPr>
-              <a:t>8</a:t>
+              <a:t>10</a:t>
             </a:r>
           </a:p>
         </p:txBody>
@@ -8071,7 +7304,7 @@
           <p:cNvPr id="3" name="Rectangle 2">
             <a:extLst>
               <a:ext uri="{FF2B5EF4-FFF2-40B4-BE49-F238E27FC236}">
-                <a16:creationId xmlns:a16="http://schemas.microsoft.com/office/drawing/2014/main" id="{621A4F22-3966-4C88-8EF4-A5111465FE71}"/>
+                <a16:creationId xmlns:a16="http://schemas.microsoft.com/office/drawing/2014/main" id="{8BA3473F-5D61-4CEB-AAF6-6B6693EF584A}"/>
               </a:ext>
             </a:extLst>
           </p:cNvPr>
@@ -8105,10 +7338,272 @@
       </p:sp>
       <p:sp>
         <p:nvSpPr>
-          <p:cNvPr id="4" name="TextBox 3">
-            <a:extLst>
-              <a:ext uri="{FF2B5EF4-FFF2-40B4-BE49-F238E27FC236}">
-                <a16:creationId xmlns:a16="http://schemas.microsoft.com/office/drawing/2014/main" id="{692753CC-43B6-13EB-2EDD-1A1DF0D1D655}"/>
+          <p:cNvPr id="4" name="Rectangle 3">
+            <a:extLst>
+              <a:ext uri="{FF2B5EF4-FFF2-40B4-BE49-F238E27FC236}">
+                <a16:creationId xmlns:a16="http://schemas.microsoft.com/office/drawing/2014/main" id="{10B9E3D5-151C-4BD4-890E-18537A14A957}"/>
+              </a:ext>
+            </a:extLst>
+          </p:cNvPr>
+          <p:cNvSpPr>
+            <a:spLocks noGrp="1"/>
+          </p:cNvSpPr>
+          <p:nvPr/>
+        </p:nvSpPr>
+        <p:spPr>
+          <a:xfrm>
+            <a:off x="762000" y="1428750"/>
+            <a:ext cx="952500" cy="381000"/>
+          </a:xfrm>
+          <a:prstGeom prst="rect">
+            <a:avLst/>
+          </a:prstGeom>
+          <a:noFill/>
+          <a:ln w="0">
+            <a:noFill/>
+          </a:ln>
+        </p:spPr>
+        <p:txBody>
+          <a:bodyPr anchor="ctr"/>
+          <a:lstStyle/>
+          <a:p>
+            <a:pPr algn="l">
+              <a:defRPr sz="1950" b="1">
+                <a:solidFill>
+                  <a:srgbClr val="2F80ED"/>
+                </a:solidFill>
+                <a:latin typeface="Helvetica Neue"/>
+                <a:ea typeface="Helvetica Neue"/>
+                <a:cs typeface="Helvetica Neue"/>
+              </a:defRPr>
+            </a:pPr>
+            <a:r>
+              <a:rPr sz="1950" b="1">
+                <a:solidFill>
+                  <a:srgbClr val="2F80ED"/>
+                </a:solidFill>
+                <a:latin typeface="Helvetica Neue"/>
+                <a:ea typeface="Helvetica Neue"/>
+                <a:cs typeface="Helvetica Neue"/>
+              </a:rPr>
+              <a:t>RQ1</a:t>
+            </a:r>
+          </a:p>
+        </p:txBody>
+      </p:sp>
+      <p:sp>
+        <p:nvSpPr>
+          <p:cNvPr id="5" name="Rectangle 4">
+            <a:extLst>
+              <a:ext uri="{FF2B5EF4-FFF2-40B4-BE49-F238E27FC236}">
+                <a16:creationId xmlns:a16="http://schemas.microsoft.com/office/drawing/2014/main" id="{5597624C-D5CE-42F2-B4C2-B18F9C2A310C}"/>
+              </a:ext>
+            </a:extLst>
+          </p:cNvPr>
+          <p:cNvSpPr>
+            <a:spLocks noGrp="1"/>
+          </p:cNvSpPr>
+          <p:nvPr/>
+        </p:nvSpPr>
+        <p:spPr>
+          <a:xfrm>
+            <a:off x="1809750" y="1352550"/>
+            <a:ext cx="9239250" cy="571500"/>
+          </a:xfrm>
+          <a:prstGeom prst="rect">
+            <a:avLst/>
+          </a:prstGeom>
+          <a:noFill/>
+          <a:ln w="0">
+            <a:noFill/>
+          </a:ln>
+        </p:spPr>
+        <p:txBody>
+          <a:bodyPr anchor="ctr"/>
+          <a:lstStyle/>
+          <a:p>
+            <a:pPr algn="l">
+              <a:defRPr sz="1875" b="1">
+                <a:solidFill>
+                  <a:srgbClr val="1F2933"/>
+                </a:solidFill>
+                <a:latin typeface="Helvetica Neue"/>
+                <a:ea typeface="Helvetica Neue"/>
+                <a:cs typeface="Helvetica Neue"/>
+              </a:defRPr>
+            </a:pPr>
+            <a:r>
+              <a:rPr lang="en-US" sz="1875" b="1" dirty="0">
+                <a:solidFill>
+                  <a:srgbClr val="1F2933"/>
+                </a:solidFill>
+                <a:latin typeface="Helvetica Neue"/>
+                <a:ea typeface="Helvetica Neue"/>
+                <a:cs typeface="Helvetica Neue"/>
+              </a:rPr>
+              <a:t>Price, Return, Volatility, Indicator Patterns</a:t>
+            </a:r>
+            <a:endParaRPr sz="1875" b="1" dirty="0">
+              <a:solidFill>
+                <a:srgbClr val="1F2933"/>
+              </a:solidFill>
+              <a:latin typeface="Helvetica Neue"/>
+              <a:ea typeface="Helvetica Neue"/>
+              <a:cs typeface="Helvetica Neue"/>
+            </a:endParaRPr>
+          </a:p>
+        </p:txBody>
+      </p:sp>
+      <p:pic>
+        <p:nvPicPr>
+          <p:cNvPr id="21" name="Picture 20">
+            <a:extLst>
+              <a:ext uri="{FF2B5EF4-FFF2-40B4-BE49-F238E27FC236}">
+                <a16:creationId xmlns:a16="http://schemas.microsoft.com/office/drawing/2014/main" id="{E761BE0D-F43D-8F52-0D8E-6C4682514FF7}"/>
+              </a:ext>
+            </a:extLst>
+          </p:cNvPr>
+          <p:cNvPicPr>
+            <a:picLocks noChangeAspect="1"/>
+          </p:cNvPicPr>
+          <p:nvPr/>
+        </p:nvPicPr>
+        <p:blipFill>
+          <a:blip r:embed="rId3">
+            <a:extLst>
+              <a:ext uri="{28A0092B-C50C-407E-A947-70E740481C1C}">
+                <a14:useLocalDpi xmlns:a14="http://schemas.microsoft.com/office/drawing/2010/main" val="0"/>
+              </a:ext>
+            </a:extLst>
+          </a:blip>
+          <a:stretch>
+            <a:fillRect/>
+          </a:stretch>
+        </p:blipFill>
+        <p:spPr>
+          <a:xfrm>
+            <a:off x="394354" y="1916788"/>
+            <a:ext cx="3847707" cy="1800845"/>
+          </a:xfrm>
+          <a:prstGeom prst="rect">
+            <a:avLst/>
+          </a:prstGeom>
+        </p:spPr>
+      </p:pic>
+      <p:pic>
+        <p:nvPicPr>
+          <p:cNvPr id="23" name="Picture 22">
+            <a:extLst>
+              <a:ext uri="{FF2B5EF4-FFF2-40B4-BE49-F238E27FC236}">
+                <a16:creationId xmlns:a16="http://schemas.microsoft.com/office/drawing/2014/main" id="{B1357AF5-0048-A53C-FF64-008CD17167FC}"/>
+              </a:ext>
+            </a:extLst>
+          </p:cNvPr>
+          <p:cNvPicPr>
+            <a:picLocks noChangeAspect="1"/>
+          </p:cNvPicPr>
+          <p:nvPr/>
+        </p:nvPicPr>
+        <p:blipFill>
+          <a:blip r:embed="rId4">
+            <a:extLst>
+              <a:ext uri="{28A0092B-C50C-407E-A947-70E740481C1C}">
+                <a14:useLocalDpi xmlns:a14="http://schemas.microsoft.com/office/drawing/2010/main" val="0"/>
+              </a:ext>
+            </a:extLst>
+          </a:blip>
+          <a:stretch>
+            <a:fillRect/>
+          </a:stretch>
+        </p:blipFill>
+        <p:spPr>
+          <a:xfrm>
+            <a:off x="6354648" y="1916788"/>
+            <a:ext cx="2885284" cy="1865749"/>
+          </a:xfrm>
+          <a:prstGeom prst="rect">
+            <a:avLst/>
+          </a:prstGeom>
+        </p:spPr>
+      </p:pic>
+      <p:pic>
+        <p:nvPicPr>
+          <p:cNvPr id="25" name="Picture 24">
+            <a:extLst>
+              <a:ext uri="{FF2B5EF4-FFF2-40B4-BE49-F238E27FC236}">
+                <a16:creationId xmlns:a16="http://schemas.microsoft.com/office/drawing/2014/main" id="{4B4F9196-CB1A-E3F3-7A3A-7E10256169FA}"/>
+              </a:ext>
+            </a:extLst>
+          </p:cNvPr>
+          <p:cNvPicPr>
+            <a:picLocks noChangeAspect="1"/>
+          </p:cNvPicPr>
+          <p:nvPr/>
+        </p:nvPicPr>
+        <p:blipFill>
+          <a:blip r:embed="rId5">
+            <a:extLst>
+              <a:ext uri="{28A0092B-C50C-407E-A947-70E740481C1C}">
+                <a14:useLocalDpi xmlns:a14="http://schemas.microsoft.com/office/drawing/2010/main" val="0"/>
+              </a:ext>
+            </a:extLst>
+          </a:blip>
+          <a:stretch>
+            <a:fillRect/>
+          </a:stretch>
+        </p:blipFill>
+        <p:spPr>
+          <a:xfrm>
+            <a:off x="394353" y="4281871"/>
+            <a:ext cx="3847707" cy="1983466"/>
+          </a:xfrm>
+          <a:prstGeom prst="rect">
+            <a:avLst/>
+          </a:prstGeom>
+        </p:spPr>
+      </p:pic>
+      <p:pic>
+        <p:nvPicPr>
+          <p:cNvPr id="27" name="Picture 26">
+            <a:extLst>
+              <a:ext uri="{FF2B5EF4-FFF2-40B4-BE49-F238E27FC236}">
+                <a16:creationId xmlns:a16="http://schemas.microsoft.com/office/drawing/2014/main" id="{3AE35663-B4AD-70DB-4FC7-AF9ADF63F514}"/>
+              </a:ext>
+            </a:extLst>
+          </p:cNvPr>
+          <p:cNvPicPr>
+            <a:picLocks noChangeAspect="1"/>
+          </p:cNvPicPr>
+          <p:nvPr/>
+        </p:nvPicPr>
+        <p:blipFill>
+          <a:blip r:embed="rId6">
+            <a:extLst>
+              <a:ext uri="{28A0092B-C50C-407E-A947-70E740481C1C}">
+                <a14:useLocalDpi xmlns:a14="http://schemas.microsoft.com/office/drawing/2010/main" val="0"/>
+              </a:ext>
+            </a:extLst>
+          </a:blip>
+          <a:stretch>
+            <a:fillRect/>
+          </a:stretch>
+        </p:blipFill>
+        <p:spPr>
+          <a:xfrm>
+            <a:off x="6349687" y="3981358"/>
+            <a:ext cx="2977378" cy="2467067"/>
+          </a:xfrm>
+          <a:prstGeom prst="rect">
+            <a:avLst/>
+          </a:prstGeom>
+        </p:spPr>
+      </p:pic>
+      <p:sp>
+        <p:nvSpPr>
+          <p:cNvPr id="28" name="TextBox 27">
+            <a:extLst>
+              <a:ext uri="{FF2B5EF4-FFF2-40B4-BE49-F238E27FC236}">
+                <a16:creationId xmlns:a16="http://schemas.microsoft.com/office/drawing/2014/main" id="{7E31C628-80CF-7999-331D-951E33045D12}"/>
               </a:ext>
             </a:extLst>
           </p:cNvPr>
@@ -8117,8 +7612,8 @@
         </p:nvSpPr>
         <p:spPr>
           <a:xfrm>
-            <a:off x="395927" y="1247775"/>
-            <a:ext cx="11274458" cy="5293757"/>
+            <a:off x="4242061" y="1982450"/>
+            <a:ext cx="2017337" cy="1384995"/>
           </a:xfrm>
           <a:prstGeom prst="rect">
             <a:avLst/>
@@ -8131,135 +7626,134 @@
           </a:bodyPr>
           <a:lstStyle/>
           <a:p>
-            <a:pPr lvl="0"/>
-            <a:r>
-              <a:rPr lang="en-TH" sz="1600" dirty="0"/>
-              <a:t>ภาพลวงตาของความแม่นยำ (The Accuracy Illusion)</a:t>
-            </a:r>
-          </a:p>
-          <a:p>
-            <a:pPr lvl="0"/>
-            <a:br>
+            <a:r>
               <a:rPr lang="en-TH" sz="1400" dirty="0"/>
-            </a:br>
+              <a:t>Price สินทรัพย์มีแนวโน้มเป็นขาขึ้นในระยะยาว แต่มีรอบการปรับฐานตามสภาวะเศรษฐกิจมหภาคที่ชัดเจน เช่น การปรับตัวลงอย่างรุนแรงตลอดช่วงปี 2022 ก่อนที่จะฟื้นตัวกลับมาสร้างจุดสูงสุดใหม่</a:t>
+            </a:r>
+          </a:p>
+        </p:txBody>
+      </p:sp>
+      <p:sp>
+        <p:nvSpPr>
+          <p:cNvPr id="29" name="TextBox 28">
+            <a:extLst>
+              <a:ext uri="{FF2B5EF4-FFF2-40B4-BE49-F238E27FC236}">
+                <a16:creationId xmlns:a16="http://schemas.microsoft.com/office/drawing/2014/main" id="{64236C7A-E28E-84C8-81C9-781AC597A39E}"/>
+              </a:ext>
+            </a:extLst>
+          </p:cNvPr>
+          <p:cNvSpPr txBox="1"/>
+          <p:nvPr/>
+        </p:nvSpPr>
+        <p:spPr>
+          <a:xfrm>
+            <a:off x="4242061" y="4281871"/>
+            <a:ext cx="2017337" cy="1600438"/>
+          </a:xfrm>
+          <a:prstGeom prst="rect">
+            <a:avLst/>
+          </a:prstGeom>
+          <a:noFill/>
+        </p:spPr>
+        <p:txBody>
+          <a:bodyPr wrap="square" rtlCol="0">
+            <a:spAutoFit/>
+          </a:bodyPr>
+          <a:lstStyle/>
+          <a:p>
             <a:r>
               <a:rPr lang="en-TH" sz="1400" dirty="0"/>
-              <a:t>สิ่งที่พบ โมเดลพื้นฐาน (Majority Baseline) ที่หลับตาเดาว่าตลาดจะ "ขึ้น" ทุกวัน สามารถทำ Raw Accuracy ได้สูงถึง 54.77% แต่มีค่า Balanced Accuracy และ ROC AUC เพียง 0.50 (ไม่ต่างจากการทอยเหรียญ)</a:t>
-            </a:r>
-          </a:p>
-          <a:p>
-            <a:pPr lvl="0"/>
+              <a:t>Volatility ความผันผวนไม่ได้กระจายตัวเท่ากันตลอดทั้งปี โดยพบว่าการกระจายตัวของผลตอบแทนในบางเดือนปฏิทิน เช่น เดือนเมษายนและพฤศจิกายน มีกรอบการแกว่งตัวและมีค่า Outlier ที่กว้างกว่าเดือนอื่นๆ</a:t>
+            </a:r>
+          </a:p>
+        </p:txBody>
+      </p:sp>
+      <p:sp>
+        <p:nvSpPr>
+          <p:cNvPr id="30" name="TextBox 29">
+            <a:extLst>
+              <a:ext uri="{FF2B5EF4-FFF2-40B4-BE49-F238E27FC236}">
+                <a16:creationId xmlns:a16="http://schemas.microsoft.com/office/drawing/2014/main" id="{249B99C5-AA5E-B015-2E6B-6BCFCF23A714}"/>
+              </a:ext>
+            </a:extLst>
+          </p:cNvPr>
+          <p:cNvSpPr txBox="1"/>
+          <p:nvPr/>
+        </p:nvSpPr>
+        <p:spPr>
+          <a:xfrm>
+            <a:off x="9417355" y="1982450"/>
+            <a:ext cx="2017337" cy="1815882"/>
+          </a:xfrm>
+          <a:prstGeom prst="rect">
+            <a:avLst/>
+          </a:prstGeom>
+          <a:noFill/>
+        </p:spPr>
+        <p:txBody>
+          <a:bodyPr wrap="square" rtlCol="0">
+            <a:spAutoFit/>
+          </a:bodyPr>
+          <a:lstStyle/>
+          <a:p>
             <a:r>
               <a:rPr lang="en-TH" sz="1400" dirty="0"/>
-              <a:t>Insight ในตลาดที่เอนเอียงไปทางขาขึ้น (Imbalanced class) การดูแค่ค่า Accuracy นั้นอันตรายและหลอกตา โมเดลที่ใช้งานได้จริงต้องวัดผลด้วย ROC AUC และ Balanced Accuracy</a:t>
-            </a:r>
-            <a:br>
+              <a:t>Return การกระจายตัวของผลตอบแทนรายวันมีลักษณะคล้ายการแจกแจงปกติ</a:t>
+            </a:r>
+          </a:p>
+          <a:p>
+            <a:r>
               <a:rPr lang="en-TH" sz="1400" dirty="0"/>
-            </a:br>
-            <a:endParaRPr lang="en-TH" sz="1400" dirty="0"/>
-          </a:p>
-          <a:p>
-            <a:pPr lvl="0"/>
+              <a:t>(Normal distribution)</a:t>
+            </a:r>
+          </a:p>
+          <a:p>
             <a:r>
               <a:rPr lang="en-TH" sz="1400" dirty="0"/>
-              <a:t>2. โมเดลที่ดีที่สุด (The Champion Model: Gradient Boosting)</a:t>
-            </a:r>
-            <a:br>
+              <a:t>โดยมีจุดศูนย์กลางใกล้ 0% แต่มีลักษณะ หางหนา (Fatter tails) ซึ่งบ่งชี้ถึงการเกิดเหตุการณ์ช็อกของตลาดที่ราคาแกว่งตัวรุนแรงในบางวัน</a:t>
+            </a:r>
+          </a:p>
+        </p:txBody>
+      </p:sp>
+      <p:sp>
+        <p:nvSpPr>
+          <p:cNvPr id="31" name="TextBox 30">
+            <a:extLst>
+              <a:ext uri="{FF2B5EF4-FFF2-40B4-BE49-F238E27FC236}">
+                <a16:creationId xmlns:a16="http://schemas.microsoft.com/office/drawing/2014/main" id="{BBD6A546-B3EC-B598-BDB0-09C9767E41A1}"/>
+              </a:ext>
+            </a:extLst>
+          </p:cNvPr>
+          <p:cNvSpPr txBox="1"/>
+          <p:nvPr/>
+        </p:nvSpPr>
+        <p:spPr>
+          <a:xfrm>
+            <a:off x="9417355" y="4066427"/>
+            <a:ext cx="2017337" cy="2677656"/>
+          </a:xfrm>
+          <a:prstGeom prst="rect">
+            <a:avLst/>
+          </a:prstGeom>
+          <a:noFill/>
+        </p:spPr>
+        <p:txBody>
+          <a:bodyPr wrap="square" rtlCol="0">
+            <a:spAutoFit/>
+          </a:bodyPr>
+          <a:lstStyle/>
+          <a:p>
+            <a:r>
               <a:rPr lang="en-TH" sz="1400" dirty="0"/>
-            </a:br>
-            <a:r>
-              <a:rPr lang="en-TH" sz="1400" dirty="0"/>
-              <a:t>สิ่งที่พบ: การทำนายตลาดล่วงหน้า 1 วันเป็นเรื่องยากมาก (โมเดลส่วนใหญ่ ROC AUC เกาะกลุ่มที่ 0.50) แต่ Gradient Boosting ทำผลงานได้ดีที่สุด โดยมีค่า Balanced Accuracy = 52.74% และ ROC AUC = 0.526</a:t>
-            </a:r>
-            <a:br>
-              <a:rPr lang="en-TH" sz="1400" dirty="0"/>
-            </a:br>
-            <a:endParaRPr lang="en-TH" sz="1400" dirty="0"/>
-          </a:p>
-          <a:p>
-            <a:pPr lvl="0"/>
-            <a:r>
-              <a:rPr lang="en-TH" sz="1400" dirty="0"/>
-              <a:t>Insight: แม้ความแม่นยำดิบ (53.00%) จะน้อยกว่า Baseline แต่ Gradient Boosting มี "ทักษะการทำนาย (Predictive Skill)" ที่แท้จริง เพราะเรียนรู้ที่จะแยกแยะและดักจับได้ทั้งจังหวะตลาด "ขาขึ้น" และ "ขาลง"</a:t>
-            </a:r>
-            <a:br>
-              <a:rPr lang="en-TH" sz="1400" dirty="0"/>
-            </a:br>
-            <a:endParaRPr lang="en-TH" sz="1400" dirty="0"/>
-          </a:p>
-          <a:p>
-            <a:pPr lvl="0"/>
-            <a:r>
-              <a:rPr lang="en-TH" sz="1400" dirty="0"/>
-              <a:t>3. ปัจจัยหลักที่ใช้ทำนายตลาดระยะสั้น (Volatility &amp; Momentum Rule)</a:t>
-            </a:r>
-            <a:br>
-              <a:rPr lang="en-TH" sz="1400" dirty="0"/>
-            </a:br>
-            <a:r>
-              <a:rPr lang="en-TH" sz="1400" dirty="0"/>
-              <a:t>สิ่งที่พบ: จากการวิเคราะห์ Feature Importance ตัวแปรกลุ่ม ความผันผวน (Volatility) และ โมเมนตัม (Momentum) คือปัจจัยที่มีอิทธิพลต่อโมเดลมากที่สุด</a:t>
-            </a:r>
-            <a:br>
-              <a:rPr lang="en-TH" sz="1400" dirty="0"/>
-            </a:br>
-            <a:endParaRPr lang="en-TH" sz="1400" dirty="0"/>
-          </a:p>
-          <a:p>
-            <a:pPr lvl="0"/>
-            <a:r>
-              <a:rPr lang="en-TH" sz="1400" dirty="0"/>
-              <a:t>Top 3 Features</a:t>
-            </a:r>
-            <a:br>
-              <a:rPr lang="en-TH" sz="1400" dirty="0"/>
-            </a:br>
-            <a:r>
-              <a:rPr lang="en-TH" sz="1400" dirty="0"/>
-              <a:t>1. atr_14_pct (Average True Range - ความผันผวน)</a:t>
-            </a:r>
-            <a:br>
-              <a:rPr lang="en-TH" sz="1400" dirty="0"/>
-            </a:br>
-            <a:r>
-              <a:rPr lang="en-TH" sz="1400" dirty="0"/>
-              <a:t>2. rsi_14 (โมเมนตัม)</a:t>
-            </a:r>
-            <a:br>
-              <a:rPr lang="en-TH" sz="1400" dirty="0"/>
-            </a:br>
-            <a:r>
-              <a:rPr lang="en-TH" sz="1400" dirty="0"/>
-              <a:t>3. roc_10 (โมเมนตัม)</a:t>
-            </a:r>
-            <a:br>
-              <a:rPr lang="en-TH" sz="1400" dirty="0"/>
-            </a:br>
-            <a:endParaRPr lang="en-TH" sz="1400" dirty="0"/>
-          </a:p>
-          <a:p>
-            <a:pPr lvl="0"/>
-            <a:r>
-              <a:rPr lang="en-TH" sz="1400" dirty="0"/>
-              <a:t>Insight </a:t>
-            </a:r>
-          </a:p>
-          <a:p>
-            <a:pPr lvl="0"/>
-            <a:r>
-              <a:rPr lang="en-TH" sz="1400" dirty="0"/>
-              <a:t>สำหรับการทำนายระยะสั้นเพียง 1 วัน ตัวชี้วัดกลุ่มแนวโน้ม (Trend) และปริมาณการซื้อขาย (Volume) แทบจะไม่มีประโยชน์และให้ข้อมูลที่ช้าเกินไป (Lagging)</a:t>
-            </a:r>
-          </a:p>
-          <a:p>
-            <a:endParaRPr lang="en-TH" sz="1400" dirty="0"/>
+              <a:t>Indicator Patterns กลุ่มตัวชี้วัดที่เป็น Trend มีค่าความสัมพันธ์กันเอง (Collinearity) สูงมาก และเมื่อนำตัวชี้วัดมาพล็อตเทียบกับผลตอบแทนวันถัดไป พบว่าข้อมูลเกาะกลุ่มกันหนาแน่นโดยไม่มีการแบ่งแยกเชิงเส้นที่ชัดเจน (Lack of linear separability) ซึ่งบังคับให้ต้องใช้โมเดล Machine Learning แบบ Non-linear ในการวิเคราะห์</a:t>
+            </a:r>
           </a:p>
         </p:txBody>
       </p:sp>
     </p:spTree>
     <p:extLst>
       <p:ext uri="{BB962C8B-B14F-4D97-AF65-F5344CB8AC3E}">
-        <p14:creationId xmlns:p14="http://schemas.microsoft.com/office/powerpoint/2010/main" val="336995676"/>
+        <p14:creationId xmlns:p14="http://schemas.microsoft.com/office/powerpoint/2010/main" val="1027507952"/>
       </p:ext>
     </p:extLst>
   </p:cSld>
@@ -8272,17 +7766,15 @@
 <file path=ppt/slides/slide19.xml><?xml version="1.0" encoding="utf-8"?>
 <p:sld xmlns:a="http://schemas.openxmlformats.org/drawingml/2006/main" xmlns:r="http://schemas.openxmlformats.org/officeDocument/2006/relationships" xmlns:p="http://schemas.openxmlformats.org/presentationml/2006/main">
   <p:cSld>
-    <p:bg>
-      <p:bgPr>
-        <a:solidFill>
-          <a:srgbClr val="FFFFFF"/>
-        </a:solidFill>
-        <a:effectLst/>
-      </p:bgPr>
-    </p:bg>
     <p:spTree>
       <p:nvGrpSpPr>
-        <p:cNvPr id="1" name=""/>
+        <p:cNvPr id="1" name="">
+          <a:extLst>
+            <a:ext uri="{FF2B5EF4-FFF2-40B4-BE49-F238E27FC236}">
+              <a16:creationId xmlns:a16="http://schemas.microsoft.com/office/drawing/2014/main" id="{C1857CBE-35B1-D9B4-70E6-E9C47472808A}"/>
+            </a:ext>
+          </a:extLst>
+        </p:cNvPr>
         <p:cNvGrpSpPr/>
         <p:nvPr/>
       </p:nvGrpSpPr>
@@ -8299,7 +7791,7 @@
           <p:cNvPr id="11" name="Rectangle 10">
             <a:extLst>
               <a:ext uri="{FF2B5EF4-FFF2-40B4-BE49-F238E27FC236}">
-                <a16:creationId xmlns:a16="http://schemas.microsoft.com/office/drawing/2014/main" id="{E2B0BADA-902F-4436-B445-0E75100F2514}"/>
+                <a16:creationId xmlns:a16="http://schemas.microsoft.com/office/drawing/2014/main" id="{69FEC95F-8A71-8A1D-2238-EDA3A1512ADA}"/>
               </a:ext>
             </a:extLst>
           </p:cNvPr>
@@ -8365,7 +7857,7 @@
           <p:cNvPr id="2" name="Rectangle 1">
             <a:extLst>
               <a:ext uri="{FF2B5EF4-FFF2-40B4-BE49-F238E27FC236}">
-                <a16:creationId xmlns:a16="http://schemas.microsoft.com/office/drawing/2014/main" id="{2F679DA9-CC46-4CC5-9BC6-106A89979AC3}"/>
+                <a16:creationId xmlns:a16="http://schemas.microsoft.com/office/drawing/2014/main" id="{EEA75897-CC98-8856-5F07-6AA725E59209}"/>
               </a:ext>
             </a:extLst>
           </p:cNvPr>
@@ -8420,7 +7912,7 @@
           <p:cNvPr id="3" name="Rectangle 2">
             <a:extLst>
               <a:ext uri="{FF2B5EF4-FFF2-40B4-BE49-F238E27FC236}">
-                <a16:creationId xmlns:a16="http://schemas.microsoft.com/office/drawing/2014/main" id="{8BA3473F-5D61-4CEB-AAF6-6B6693EF584A}"/>
+                <a16:creationId xmlns:a16="http://schemas.microsoft.com/office/drawing/2014/main" id="{0ABF8C54-FFCD-76B9-FEAB-683E7DFD7901}"/>
               </a:ext>
             </a:extLst>
           </p:cNvPr>
@@ -8454,22 +7946,22 @@
       </p:sp>
       <p:sp>
         <p:nvSpPr>
-          <p:cNvPr id="4" name="Rectangle 3">
-            <a:extLst>
-              <a:ext uri="{FF2B5EF4-FFF2-40B4-BE49-F238E27FC236}">
-                <a16:creationId xmlns:a16="http://schemas.microsoft.com/office/drawing/2014/main" id="{10B9E3D5-151C-4BD4-890E-18537A14A957}"/>
-              </a:ext>
-            </a:extLst>
-          </p:cNvPr>
-          <p:cNvSpPr>
-            <a:spLocks noGrp="1"/>
-          </p:cNvSpPr>
-          <p:nvPr/>
-        </p:nvSpPr>
-        <p:spPr>
-          <a:xfrm>
-            <a:off x="762000" y="1428750"/>
-            <a:ext cx="952500" cy="381000"/>
+          <p:cNvPr id="5" name="Rectangle 4">
+            <a:extLst>
+              <a:ext uri="{FF2B5EF4-FFF2-40B4-BE49-F238E27FC236}">
+                <a16:creationId xmlns:a16="http://schemas.microsoft.com/office/drawing/2014/main" id="{9A855845-F4D3-0604-420C-F25EADB35DD4}"/>
+              </a:ext>
+            </a:extLst>
+          </p:cNvPr>
+          <p:cNvSpPr>
+            <a:spLocks noGrp="1"/>
+          </p:cNvSpPr>
+          <p:nvPr/>
+        </p:nvSpPr>
+        <p:spPr>
+          <a:xfrm>
+            <a:off x="1809750" y="1352550"/>
+            <a:ext cx="9239250" cy="571500"/>
           </a:xfrm>
           <a:prstGeom prst="rect">
             <a:avLst/>
@@ -8483,10 +7975,10 @@
           <a:bodyPr anchor="ctr"/>
           <a:lstStyle/>
           <a:p>
-            <a:pPr algn="l">
-              <a:defRPr sz="1950" b="1">
-                <a:solidFill>
-                  <a:srgbClr val="2F80ED"/>
+            <a:pPr>
+              <a:defRPr sz="1875" b="1">
+                <a:solidFill>
+                  <a:srgbClr val="1F2933"/>
                 </a:solidFill>
                 <a:latin typeface="Helvetica Neue"/>
                 <a:ea typeface="Helvetica Neue"/>
@@ -8494,37 +7986,35 @@
               </a:defRPr>
             </a:pPr>
             <a:r>
-              <a:rPr sz="1950" b="1">
-                <a:solidFill>
-                  <a:srgbClr val="2F80ED"/>
-                </a:solidFill>
-                <a:latin typeface="Helvetica Neue"/>
-                <a:ea typeface="Helvetica Neue"/>
-                <a:cs typeface="Helvetica Neue"/>
+              <a:rPr lang="en-TH" sz="1875" b="1" dirty="0">
+                <a:solidFill>
+                  <a:srgbClr val="1F2933"/>
+                </a:solidFill>
+                <a:latin typeface="Helvetica Neue"/>
               </a:rPr>
-              <a:t>RQ1</a:t>
-            </a:r>
-          </a:p>
-        </p:txBody>
-      </p:sp>
-      <p:sp>
-        <p:nvSpPr>
-          <p:cNvPr id="5" name="Rectangle 4">
-            <a:extLst>
-              <a:ext uri="{FF2B5EF4-FFF2-40B4-BE49-F238E27FC236}">
-                <a16:creationId xmlns:a16="http://schemas.microsoft.com/office/drawing/2014/main" id="{5597624C-D5CE-42F2-B4C2-B18F9C2A310C}"/>
-              </a:ext>
-            </a:extLst>
-          </p:cNvPr>
-          <p:cNvSpPr>
-            <a:spLocks noGrp="1"/>
-          </p:cNvSpPr>
-          <p:nvPr/>
-        </p:nvSpPr>
-        <p:spPr>
-          <a:xfrm>
-            <a:off x="1809750" y="1352550"/>
-            <a:ext cx="9239250" cy="571500"/>
+              <a:t>Individual Features, Indicator Families</a:t>
+            </a:r>
+          </a:p>
+        </p:txBody>
+      </p:sp>
+      <p:sp>
+        <p:nvSpPr>
+          <p:cNvPr id="6" name="Rectangle 5">
+            <a:extLst>
+              <a:ext uri="{FF2B5EF4-FFF2-40B4-BE49-F238E27FC236}">
+                <a16:creationId xmlns:a16="http://schemas.microsoft.com/office/drawing/2014/main" id="{D68D38FE-D903-7416-D02A-5C52CEDC9159}"/>
+              </a:ext>
+            </a:extLst>
+          </p:cNvPr>
+          <p:cNvSpPr>
+            <a:spLocks noGrp="1"/>
+          </p:cNvSpPr>
+          <p:nvPr/>
+        </p:nvSpPr>
+        <p:spPr>
+          <a:xfrm>
+            <a:off x="762000" y="1447800"/>
+            <a:ext cx="952500" cy="381000"/>
           </a:xfrm>
           <a:prstGeom prst="rect">
             <a:avLst/>
@@ -8539,9 +8029,9 @@
           <a:lstStyle/>
           <a:p>
             <a:pPr algn="l">
-              <a:defRPr sz="1875" b="1">
-                <a:solidFill>
-                  <a:srgbClr val="1F2933"/>
+              <a:defRPr sz="1950" b="1">
+                <a:solidFill>
+                  <a:srgbClr val="219EBC"/>
                 </a:solidFill>
                 <a:latin typeface="Helvetica Neue"/>
                 <a:ea typeface="Helvetica Neue"/>
@@ -8549,33 +8039,25 @@
               </a:defRPr>
             </a:pPr>
             <a:r>
-              <a:rPr lang="en-US" sz="1875" b="1" dirty="0">
-                <a:solidFill>
-                  <a:srgbClr val="1F2933"/>
+              <a:rPr sz="1950" b="1" dirty="0">
+                <a:solidFill>
+                  <a:srgbClr val="219EBC"/>
                 </a:solidFill>
                 <a:latin typeface="Helvetica Neue"/>
                 <a:ea typeface="Helvetica Neue"/>
                 <a:cs typeface="Helvetica Neue"/>
               </a:rPr>
-              <a:t>Price, Return, Volatility, Indicator Patterns</a:t>
-            </a:r>
-            <a:endParaRPr sz="1875" b="1" dirty="0">
-              <a:solidFill>
-                <a:srgbClr val="1F2933"/>
-              </a:solidFill>
-              <a:latin typeface="Helvetica Neue"/>
-              <a:ea typeface="Helvetica Neue"/>
-              <a:cs typeface="Helvetica Neue"/>
-            </a:endParaRPr>
+              <a:t>RQ2</a:t>
+            </a:r>
           </a:p>
         </p:txBody>
       </p:sp>
       <p:pic>
         <p:nvPicPr>
-          <p:cNvPr id="21" name="Picture 20">
-            <a:extLst>
-              <a:ext uri="{FF2B5EF4-FFF2-40B4-BE49-F238E27FC236}">
-                <a16:creationId xmlns:a16="http://schemas.microsoft.com/office/drawing/2014/main" id="{E761BE0D-F43D-8F52-0D8E-6C4682514FF7}"/>
+          <p:cNvPr id="14" name="Picture 13">
+            <a:extLst>
+              <a:ext uri="{FF2B5EF4-FFF2-40B4-BE49-F238E27FC236}">
+                <a16:creationId xmlns:a16="http://schemas.microsoft.com/office/drawing/2014/main" id="{605E2F7B-3BBC-EDCD-CA24-4A8A0EEFAFD0}"/>
               </a:ext>
             </a:extLst>
           </p:cNvPr>
@@ -8598,8 +8080,8 @@
         </p:blipFill>
         <p:spPr>
           <a:xfrm>
-            <a:off x="394354" y="1916788"/>
-            <a:ext cx="3847707" cy="1800845"/>
+            <a:off x="999240" y="2086781"/>
+            <a:ext cx="4339535" cy="2976649"/>
           </a:xfrm>
           <a:prstGeom prst="rect">
             <a:avLst/>
@@ -8608,10 +8090,10 @@
       </p:pic>
       <p:pic>
         <p:nvPicPr>
-          <p:cNvPr id="23" name="Picture 22">
-            <a:extLst>
-              <a:ext uri="{FF2B5EF4-FFF2-40B4-BE49-F238E27FC236}">
-                <a16:creationId xmlns:a16="http://schemas.microsoft.com/office/drawing/2014/main" id="{B1357AF5-0048-A53C-FF64-008CD17167FC}"/>
+          <p:cNvPr id="16" name="Picture 15">
+            <a:extLst>
+              <a:ext uri="{FF2B5EF4-FFF2-40B4-BE49-F238E27FC236}">
+                <a16:creationId xmlns:a16="http://schemas.microsoft.com/office/drawing/2014/main" id="{2D540FA9-EE37-4D51-273C-A52575A24843}"/>
               </a:ext>
             </a:extLst>
           </p:cNvPr>
@@ -8634,92 +8116,20 @@
         </p:blipFill>
         <p:spPr>
           <a:xfrm>
-            <a:off x="6354648" y="1916788"/>
-            <a:ext cx="2885284" cy="1865749"/>
+            <a:off x="5929460" y="2086781"/>
+            <a:ext cx="5070912" cy="2976598"/>
           </a:xfrm>
           <a:prstGeom prst="rect">
             <a:avLst/>
           </a:prstGeom>
         </p:spPr>
       </p:pic>
-      <p:pic>
-        <p:nvPicPr>
-          <p:cNvPr id="25" name="Picture 24">
-            <a:extLst>
-              <a:ext uri="{FF2B5EF4-FFF2-40B4-BE49-F238E27FC236}">
-                <a16:creationId xmlns:a16="http://schemas.microsoft.com/office/drawing/2014/main" id="{4B4F9196-CB1A-E3F3-7A3A-7E10256169FA}"/>
-              </a:ext>
-            </a:extLst>
-          </p:cNvPr>
-          <p:cNvPicPr>
-            <a:picLocks noChangeAspect="1"/>
-          </p:cNvPicPr>
-          <p:nvPr/>
-        </p:nvPicPr>
-        <p:blipFill>
-          <a:blip r:embed="rId5">
-            <a:extLst>
-              <a:ext uri="{28A0092B-C50C-407E-A947-70E740481C1C}">
-                <a14:useLocalDpi xmlns:a14="http://schemas.microsoft.com/office/drawing/2010/main" val="0"/>
-              </a:ext>
-            </a:extLst>
-          </a:blip>
-          <a:stretch>
-            <a:fillRect/>
-          </a:stretch>
-        </p:blipFill>
-        <p:spPr>
-          <a:xfrm>
-            <a:off x="394353" y="4281871"/>
-            <a:ext cx="3847707" cy="1983466"/>
-          </a:xfrm>
-          <a:prstGeom prst="rect">
-            <a:avLst/>
-          </a:prstGeom>
-        </p:spPr>
-      </p:pic>
-      <p:pic>
-        <p:nvPicPr>
-          <p:cNvPr id="27" name="Picture 26">
-            <a:extLst>
-              <a:ext uri="{FF2B5EF4-FFF2-40B4-BE49-F238E27FC236}">
-                <a16:creationId xmlns:a16="http://schemas.microsoft.com/office/drawing/2014/main" id="{3AE35663-B4AD-70DB-4FC7-AF9ADF63F514}"/>
-              </a:ext>
-            </a:extLst>
-          </p:cNvPr>
-          <p:cNvPicPr>
-            <a:picLocks noChangeAspect="1"/>
-          </p:cNvPicPr>
-          <p:nvPr/>
-        </p:nvPicPr>
-        <p:blipFill>
-          <a:blip r:embed="rId6">
-            <a:extLst>
-              <a:ext uri="{28A0092B-C50C-407E-A947-70E740481C1C}">
-                <a14:useLocalDpi xmlns:a14="http://schemas.microsoft.com/office/drawing/2010/main" val="0"/>
-              </a:ext>
-            </a:extLst>
-          </a:blip>
-          <a:stretch>
-            <a:fillRect/>
-          </a:stretch>
-        </p:blipFill>
-        <p:spPr>
-          <a:xfrm>
-            <a:off x="6349687" y="3981358"/>
-            <a:ext cx="2977378" cy="2467067"/>
-          </a:xfrm>
-          <a:prstGeom prst="rect">
-            <a:avLst/>
-          </a:prstGeom>
-        </p:spPr>
-      </p:pic>
-      <p:sp>
-        <p:nvSpPr>
-          <p:cNvPr id="28" name="TextBox 27">
-            <a:extLst>
-              <a:ext uri="{FF2B5EF4-FFF2-40B4-BE49-F238E27FC236}">
-                <a16:creationId xmlns:a16="http://schemas.microsoft.com/office/drawing/2014/main" id="{7E31C628-80CF-7999-331D-951E33045D12}"/>
+      <p:sp>
+        <p:nvSpPr>
+          <p:cNvPr id="17" name="TextBox 16">
+            <a:extLst>
+              <a:ext uri="{FF2B5EF4-FFF2-40B4-BE49-F238E27FC236}">
+                <a16:creationId xmlns:a16="http://schemas.microsoft.com/office/drawing/2014/main" id="{24A5367F-4374-6908-81EC-5999479FB6E2}"/>
               </a:ext>
             </a:extLst>
           </p:cNvPr>
@@ -8728,8 +8138,8 @@
         </p:nvSpPr>
         <p:spPr>
           <a:xfrm>
-            <a:off x="4242061" y="1982450"/>
-            <a:ext cx="2017337" cy="1384995"/>
+            <a:off x="609600" y="5410200"/>
+            <a:ext cx="5093616" cy="738664"/>
           </a:xfrm>
           <a:prstGeom prst="rect">
             <a:avLst/>
@@ -8744,17 +8154,17 @@
           <a:p>
             <a:r>
               <a:rPr lang="en-TH" sz="1400" dirty="0"/>
-              <a:t>Price สินทรัพย์มีแนวโน้มเป็นขาขึ้นในระยะยาว แต่มีรอบการปรับฐานตามสภาวะเศรษฐกิจมหภาคที่ชัดเจน เช่น การปรับตัวลงอย่างรุนแรงตลอดช่วงปี 2022 ก่อนที่จะฟื้นตัวกลับมาสร้างจุดสูงสุดใหม่</a:t>
-            </a:r>
-          </a:p>
-        </p:txBody>
-      </p:sp>
-      <p:sp>
-        <p:nvSpPr>
-          <p:cNvPr id="29" name="TextBox 28">
-            <a:extLst>
-              <a:ext uri="{FF2B5EF4-FFF2-40B4-BE49-F238E27FC236}">
-                <a16:creationId xmlns:a16="http://schemas.microsoft.com/office/drawing/2014/main" id="{64236C7A-E28E-84C8-81C9-781AC597A39E}"/>
+              <a:t>ระดับตัวแปรเดี่ยว (Individual Features) ตัวชี้วัดที่สำคัญที่สุดอันดับหนึ่งคือ atr_14_pct (Average True Range Percentage) รองลงมาคือตัวชี้วัดด้านโมเมนตัม ได้แก่ rsi_14 (Relative Strength Index) และ roc_10 (Rate of Change)</a:t>
+            </a:r>
+          </a:p>
+        </p:txBody>
+      </p:sp>
+      <p:sp>
+        <p:nvSpPr>
+          <p:cNvPr id="18" name="TextBox 17">
+            <a:extLst>
+              <a:ext uri="{FF2B5EF4-FFF2-40B4-BE49-F238E27FC236}">
+                <a16:creationId xmlns:a16="http://schemas.microsoft.com/office/drawing/2014/main" id="{690439B4-9ADD-3389-838B-C911C429EFAF}"/>
               </a:ext>
             </a:extLst>
           </p:cNvPr>
@@ -8763,8 +8173,8 @@
         </p:nvSpPr>
         <p:spPr>
           <a:xfrm>
-            <a:off x="4242061" y="4281871"/>
-            <a:ext cx="2017337" cy="1600438"/>
+            <a:off x="6096000" y="5410200"/>
+            <a:ext cx="4953000" cy="1169551"/>
           </a:xfrm>
           <a:prstGeom prst="rect">
             <a:avLst/>
@@ -8779,89 +8189,7 @@
           <a:p>
             <a:r>
               <a:rPr lang="en-TH" sz="1400" dirty="0"/>
-              <a:t>Volatility ความผันผวนไม่ได้กระจายตัวเท่ากันตลอดทั้งปี โดยพบว่าการกระจายตัวของผลตอบแทนในบางเดือนปฏิทิน เช่น เดือนเมษายนและพฤศจิกายน มีกรอบการแกว่งตัวและมีค่า Outlier ที่กว้างกว่าเดือนอื่นๆ</a:t>
-            </a:r>
-          </a:p>
-        </p:txBody>
-      </p:sp>
-      <p:sp>
-        <p:nvSpPr>
-          <p:cNvPr id="30" name="TextBox 29">
-            <a:extLst>
-              <a:ext uri="{FF2B5EF4-FFF2-40B4-BE49-F238E27FC236}">
-                <a16:creationId xmlns:a16="http://schemas.microsoft.com/office/drawing/2014/main" id="{249B99C5-AA5E-B015-2E6B-6BCFCF23A714}"/>
-              </a:ext>
-            </a:extLst>
-          </p:cNvPr>
-          <p:cNvSpPr txBox="1"/>
-          <p:nvPr/>
-        </p:nvSpPr>
-        <p:spPr>
-          <a:xfrm>
-            <a:off x="9417355" y="1982450"/>
-            <a:ext cx="2017337" cy="1815882"/>
-          </a:xfrm>
-          <a:prstGeom prst="rect">
-            <a:avLst/>
-          </a:prstGeom>
-          <a:noFill/>
-        </p:spPr>
-        <p:txBody>
-          <a:bodyPr wrap="square" rtlCol="0">
-            <a:spAutoFit/>
-          </a:bodyPr>
-          <a:lstStyle/>
-          <a:p>
-            <a:r>
-              <a:rPr lang="en-TH" sz="1400" dirty="0"/>
-              <a:t>Return การกระจายตัวของผลตอบแทนรายวันมีลักษณะคล้ายการแจกแจงปกติ</a:t>
-            </a:r>
-          </a:p>
-          <a:p>
-            <a:r>
-              <a:rPr lang="en-TH" sz="1400" dirty="0"/>
-              <a:t>(Normal distribution)</a:t>
-            </a:r>
-          </a:p>
-          <a:p>
-            <a:r>
-              <a:rPr lang="en-TH" sz="1400" dirty="0"/>
-              <a:t>โดยมีจุดศูนย์กลางใกล้ 0% แต่มีลักษณะ หางหนา (Fatter tails) ซึ่งบ่งชี้ถึงการเกิดเหตุการณ์ช็อกของตลาดที่ราคาแกว่งตัวรุนแรงในบางวัน</a:t>
-            </a:r>
-          </a:p>
-        </p:txBody>
-      </p:sp>
-      <p:sp>
-        <p:nvSpPr>
-          <p:cNvPr id="31" name="TextBox 30">
-            <a:extLst>
-              <a:ext uri="{FF2B5EF4-FFF2-40B4-BE49-F238E27FC236}">
-                <a16:creationId xmlns:a16="http://schemas.microsoft.com/office/drawing/2014/main" id="{BBD6A546-B3EC-B598-BDB0-09C9767E41A1}"/>
-              </a:ext>
-            </a:extLst>
-          </p:cNvPr>
-          <p:cNvSpPr txBox="1"/>
-          <p:nvPr/>
-        </p:nvSpPr>
-        <p:spPr>
-          <a:xfrm>
-            <a:off x="9417355" y="4066427"/>
-            <a:ext cx="2017337" cy="2677656"/>
-          </a:xfrm>
-          <a:prstGeom prst="rect">
-            <a:avLst/>
-          </a:prstGeom>
-          <a:noFill/>
-        </p:spPr>
-        <p:txBody>
-          <a:bodyPr wrap="square" rtlCol="0">
-            <a:spAutoFit/>
-          </a:bodyPr>
-          <a:lstStyle/>
-          <a:p>
-            <a:r>
-              <a:rPr lang="en-TH" sz="1400" dirty="0"/>
-              <a:t>Indicator Patterns กลุ่มตัวชี้วัดที่เป็น Trend มีค่าความสัมพันธ์กันเอง (Collinearity) สูงมาก และเมื่อนำตัวชี้วัดมาพล็อตเทียบกับผลตอบแทนวันถัดไป พบว่าข้อมูลเกาะกลุ่มกันหนาแน่นโดยไม่มีการแบ่งแยกเชิงเส้นที่ชัดเจน (Lack of linear separability) ซึ่งบังคับให้ต้องใช้โมเดล Machine Learning แบบ Non-linear ในการวิเคราะห์</a:t>
+              <a:t>ระดับกลุ่มตัวแปร (Indicator Families) กลุ่มตัวแปรด้านความผันผวน (Volatility) และโมเมนตัมระยะสั้น (Momentum) เป็นกลไกหลักที่ทรงอิทธิพลที่สุดในการตัดสินใจของโมเดล ในทางกลับกัน ตัวชี้วัดกลุ่มแนวโน้ม (Trend) แทบไม่มีประโยชน์ต่อการทำนายระยะ 1 วันเลย และกลุ่มปริมาณการซื้อขาย (Volume) มีค่าความสำคัญติดลบ ซึ่งหมายความว่าทำให้ประสิทธิภาพการทำนายลดลง</a:t>
             </a:r>
           </a:p>
         </p:txBody>
@@ -8869,7 +8197,7 @@
     </p:spTree>
     <p:extLst>
       <p:ext uri="{BB962C8B-B14F-4D97-AF65-F5344CB8AC3E}">
-        <p14:creationId xmlns:p14="http://schemas.microsoft.com/office/powerpoint/2010/main" val="1027507952"/>
+        <p14:creationId xmlns:p14="http://schemas.microsoft.com/office/powerpoint/2010/main" val="2157749109"/>
       </p:ext>
     </p:extLst>
   </p:cSld>
@@ -9693,450 +9021,6 @@
         <p:cNvPr id="1" name="">
           <a:extLst>
             <a:ext uri="{FF2B5EF4-FFF2-40B4-BE49-F238E27FC236}">
-              <a16:creationId xmlns:a16="http://schemas.microsoft.com/office/drawing/2014/main" id="{C1857CBE-35B1-D9B4-70E6-E9C47472808A}"/>
-            </a:ext>
-          </a:extLst>
-        </p:cNvPr>
-        <p:cNvGrpSpPr/>
-        <p:nvPr/>
-      </p:nvGrpSpPr>
-      <p:grpSpPr>
-        <a:xfrm>
-          <a:off x="0" y="0"/>
-          <a:ext cx="0" cy="0"/>
-          <a:chOff x="0" y="0"/>
-          <a:chExt cx="0" cy="0"/>
-        </a:xfrm>
-      </p:grpSpPr>
-      <p:sp>
-        <p:nvSpPr>
-          <p:cNvPr id="11" name="Rectangle 10">
-            <a:extLst>
-              <a:ext uri="{FF2B5EF4-FFF2-40B4-BE49-F238E27FC236}">
-                <a16:creationId xmlns:a16="http://schemas.microsoft.com/office/drawing/2014/main" id="{69FEC95F-8A71-8A1D-2238-EDA3A1512ADA}"/>
-              </a:ext>
-            </a:extLst>
-          </p:cNvPr>
-          <p:cNvSpPr>
-            <a:spLocks noGrp="1"/>
-          </p:cNvSpPr>
-          <p:nvPr/>
-        </p:nvSpPr>
-        <p:spPr>
-          <a:xfrm>
-            <a:off x="609600" y="342900"/>
-            <a:ext cx="10668000" cy="571500"/>
-          </a:xfrm>
-          <a:prstGeom prst="rect">
-            <a:avLst/>
-          </a:prstGeom>
-          <a:noFill/>
-          <a:ln w="0">
-            <a:noFill/>
-          </a:ln>
-        </p:spPr>
-        <p:txBody>
-          <a:bodyPr anchor="ctr"/>
-          <a:lstStyle/>
-          <a:p>
-            <a:pPr>
-              <a:defRPr sz="2550" b="1">
-                <a:solidFill>
-                  <a:srgbClr val="16324F"/>
-                </a:solidFill>
-                <a:latin typeface="Helvetica Neue"/>
-                <a:ea typeface="Helvetica Neue"/>
-                <a:cs typeface="Helvetica Neue"/>
-              </a:defRPr>
-            </a:pPr>
-            <a:r>
-              <a:rPr lang="en-US" sz="2550" b="1" dirty="0">
-                <a:solidFill>
-                  <a:srgbClr val="16324F"/>
-                </a:solidFill>
-                <a:latin typeface="Helvetica Neue"/>
-                <a:ea typeface="Helvetica Neue"/>
-                <a:cs typeface="Helvetica Neue"/>
-              </a:rPr>
-              <a:t>Insights: </a:t>
-            </a:r>
-            <a:r>
-              <a:rPr sz="2550" b="1" dirty="0">
-                <a:solidFill>
-                  <a:srgbClr val="16324F"/>
-                </a:solidFill>
-                <a:latin typeface="Helvetica Neue"/>
-                <a:ea typeface="Helvetica Neue"/>
-                <a:cs typeface="Helvetica Neue"/>
-              </a:rPr>
-              <a:t>Answers to the research questions</a:t>
-            </a:r>
-          </a:p>
-        </p:txBody>
-      </p:sp>
-      <p:sp>
-        <p:nvSpPr>
-          <p:cNvPr id="2" name="Rectangle 1">
-            <a:extLst>
-              <a:ext uri="{FF2B5EF4-FFF2-40B4-BE49-F238E27FC236}">
-                <a16:creationId xmlns:a16="http://schemas.microsoft.com/office/drawing/2014/main" id="{EEA75897-CC98-8856-5F07-6AA725E59209}"/>
-              </a:ext>
-            </a:extLst>
-          </p:cNvPr>
-          <p:cNvSpPr>
-            <a:spLocks noGrp="1"/>
-          </p:cNvSpPr>
-          <p:nvPr/>
-        </p:nvSpPr>
-        <p:spPr>
-          <a:xfrm>
-            <a:off x="11239500" y="6334125"/>
-            <a:ext cx="342900" cy="228600"/>
-          </a:xfrm>
-          <a:prstGeom prst="rect">
-            <a:avLst/>
-          </a:prstGeom>
-          <a:noFill/>
-          <a:ln w="0">
-            <a:noFill/>
-          </a:ln>
-        </p:spPr>
-        <p:txBody>
-          <a:bodyPr anchor="ctr"/>
-          <a:lstStyle/>
-          <a:p>
-            <a:pPr algn="r">
-              <a:defRPr sz="1050" b="0">
-                <a:solidFill>
-                  <a:srgbClr val="6B7280"/>
-                </a:solidFill>
-                <a:latin typeface="Helvetica Neue"/>
-                <a:ea typeface="Helvetica Neue"/>
-                <a:cs typeface="Helvetica Neue"/>
-              </a:defRPr>
-            </a:pPr>
-            <a:r>
-              <a:rPr sz="1050" b="0">
-                <a:solidFill>
-                  <a:srgbClr val="6B7280"/>
-                </a:solidFill>
-                <a:latin typeface="Helvetica Neue"/>
-                <a:ea typeface="Helvetica Neue"/>
-                <a:cs typeface="Helvetica Neue"/>
-              </a:rPr>
-              <a:t>10</a:t>
-            </a:r>
-          </a:p>
-        </p:txBody>
-      </p:sp>
-      <p:sp>
-        <p:nvSpPr>
-          <p:cNvPr id="3" name="Rectangle 2">
-            <a:extLst>
-              <a:ext uri="{FF2B5EF4-FFF2-40B4-BE49-F238E27FC236}">
-                <a16:creationId xmlns:a16="http://schemas.microsoft.com/office/drawing/2014/main" id="{0ABF8C54-FFCD-76B9-FEAB-683E7DFD7901}"/>
-              </a:ext>
-            </a:extLst>
-          </p:cNvPr>
-          <p:cNvSpPr>
-            <a:spLocks noGrp="1"/>
-          </p:cNvSpPr>
-          <p:nvPr/>
-        </p:nvSpPr>
-        <p:spPr>
-          <a:xfrm>
-            <a:off x="609600" y="1066800"/>
-            <a:ext cx="10972800" cy="28575"/>
-          </a:xfrm>
-          <a:prstGeom prst="rect">
-            <a:avLst/>
-          </a:prstGeom>
-          <a:solidFill>
-            <a:srgbClr val="2F80ED"/>
-          </a:solidFill>
-          <a:ln w="0">
-            <a:noFill/>
-          </a:ln>
-        </p:spPr>
-        <p:txBody>
-          <a:bodyPr/>
-          <a:lstStyle/>
-          <a:p>
-            <a:endParaRPr lang="en-TH"/>
-          </a:p>
-        </p:txBody>
-      </p:sp>
-      <p:sp>
-        <p:nvSpPr>
-          <p:cNvPr id="5" name="Rectangle 4">
-            <a:extLst>
-              <a:ext uri="{FF2B5EF4-FFF2-40B4-BE49-F238E27FC236}">
-                <a16:creationId xmlns:a16="http://schemas.microsoft.com/office/drawing/2014/main" id="{9A855845-F4D3-0604-420C-F25EADB35DD4}"/>
-              </a:ext>
-            </a:extLst>
-          </p:cNvPr>
-          <p:cNvSpPr>
-            <a:spLocks noGrp="1"/>
-          </p:cNvSpPr>
-          <p:nvPr/>
-        </p:nvSpPr>
-        <p:spPr>
-          <a:xfrm>
-            <a:off x="1809750" y="1352550"/>
-            <a:ext cx="9239250" cy="571500"/>
-          </a:xfrm>
-          <a:prstGeom prst="rect">
-            <a:avLst/>
-          </a:prstGeom>
-          <a:noFill/>
-          <a:ln w="0">
-            <a:noFill/>
-          </a:ln>
-        </p:spPr>
-        <p:txBody>
-          <a:bodyPr anchor="ctr"/>
-          <a:lstStyle/>
-          <a:p>
-            <a:pPr>
-              <a:defRPr sz="1875" b="1">
-                <a:solidFill>
-                  <a:srgbClr val="1F2933"/>
-                </a:solidFill>
-                <a:latin typeface="Helvetica Neue"/>
-                <a:ea typeface="Helvetica Neue"/>
-                <a:cs typeface="Helvetica Neue"/>
-              </a:defRPr>
-            </a:pPr>
-            <a:r>
-              <a:rPr lang="en-TH" sz="1875" b="1" dirty="0">
-                <a:solidFill>
-                  <a:srgbClr val="1F2933"/>
-                </a:solidFill>
-                <a:latin typeface="Helvetica Neue"/>
-              </a:rPr>
-              <a:t>Individual Features, Indicator Families</a:t>
-            </a:r>
-          </a:p>
-        </p:txBody>
-      </p:sp>
-      <p:sp>
-        <p:nvSpPr>
-          <p:cNvPr id="6" name="Rectangle 5">
-            <a:extLst>
-              <a:ext uri="{FF2B5EF4-FFF2-40B4-BE49-F238E27FC236}">
-                <a16:creationId xmlns:a16="http://schemas.microsoft.com/office/drawing/2014/main" id="{D68D38FE-D903-7416-D02A-5C52CEDC9159}"/>
-              </a:ext>
-            </a:extLst>
-          </p:cNvPr>
-          <p:cNvSpPr>
-            <a:spLocks noGrp="1"/>
-          </p:cNvSpPr>
-          <p:nvPr/>
-        </p:nvSpPr>
-        <p:spPr>
-          <a:xfrm>
-            <a:off x="762000" y="1447800"/>
-            <a:ext cx="952500" cy="381000"/>
-          </a:xfrm>
-          <a:prstGeom prst="rect">
-            <a:avLst/>
-          </a:prstGeom>
-          <a:noFill/>
-          <a:ln w="0">
-            <a:noFill/>
-          </a:ln>
-        </p:spPr>
-        <p:txBody>
-          <a:bodyPr anchor="ctr"/>
-          <a:lstStyle/>
-          <a:p>
-            <a:pPr algn="l">
-              <a:defRPr sz="1950" b="1">
-                <a:solidFill>
-                  <a:srgbClr val="219EBC"/>
-                </a:solidFill>
-                <a:latin typeface="Helvetica Neue"/>
-                <a:ea typeface="Helvetica Neue"/>
-                <a:cs typeface="Helvetica Neue"/>
-              </a:defRPr>
-            </a:pPr>
-            <a:r>
-              <a:rPr sz="1950" b="1" dirty="0">
-                <a:solidFill>
-                  <a:srgbClr val="219EBC"/>
-                </a:solidFill>
-                <a:latin typeface="Helvetica Neue"/>
-                <a:ea typeface="Helvetica Neue"/>
-                <a:cs typeface="Helvetica Neue"/>
-              </a:rPr>
-              <a:t>RQ2</a:t>
-            </a:r>
-          </a:p>
-        </p:txBody>
-      </p:sp>
-      <p:pic>
-        <p:nvPicPr>
-          <p:cNvPr id="14" name="Picture 13">
-            <a:extLst>
-              <a:ext uri="{FF2B5EF4-FFF2-40B4-BE49-F238E27FC236}">
-                <a16:creationId xmlns:a16="http://schemas.microsoft.com/office/drawing/2014/main" id="{605E2F7B-3BBC-EDCD-CA24-4A8A0EEFAFD0}"/>
-              </a:ext>
-            </a:extLst>
-          </p:cNvPr>
-          <p:cNvPicPr>
-            <a:picLocks noChangeAspect="1"/>
-          </p:cNvPicPr>
-          <p:nvPr/>
-        </p:nvPicPr>
-        <p:blipFill>
-          <a:blip r:embed="rId3">
-            <a:extLst>
-              <a:ext uri="{28A0092B-C50C-407E-A947-70E740481C1C}">
-                <a14:useLocalDpi xmlns:a14="http://schemas.microsoft.com/office/drawing/2010/main" val="0"/>
-              </a:ext>
-            </a:extLst>
-          </a:blip>
-          <a:stretch>
-            <a:fillRect/>
-          </a:stretch>
-        </p:blipFill>
-        <p:spPr>
-          <a:xfrm>
-            <a:off x="999240" y="2086781"/>
-            <a:ext cx="4339535" cy="2976649"/>
-          </a:xfrm>
-          <a:prstGeom prst="rect">
-            <a:avLst/>
-          </a:prstGeom>
-        </p:spPr>
-      </p:pic>
-      <p:pic>
-        <p:nvPicPr>
-          <p:cNvPr id="16" name="Picture 15">
-            <a:extLst>
-              <a:ext uri="{FF2B5EF4-FFF2-40B4-BE49-F238E27FC236}">
-                <a16:creationId xmlns:a16="http://schemas.microsoft.com/office/drawing/2014/main" id="{2D540FA9-EE37-4D51-273C-A52575A24843}"/>
-              </a:ext>
-            </a:extLst>
-          </p:cNvPr>
-          <p:cNvPicPr>
-            <a:picLocks noChangeAspect="1"/>
-          </p:cNvPicPr>
-          <p:nvPr/>
-        </p:nvPicPr>
-        <p:blipFill>
-          <a:blip r:embed="rId4">
-            <a:extLst>
-              <a:ext uri="{28A0092B-C50C-407E-A947-70E740481C1C}">
-                <a14:useLocalDpi xmlns:a14="http://schemas.microsoft.com/office/drawing/2010/main" val="0"/>
-              </a:ext>
-            </a:extLst>
-          </a:blip>
-          <a:stretch>
-            <a:fillRect/>
-          </a:stretch>
-        </p:blipFill>
-        <p:spPr>
-          <a:xfrm>
-            <a:off x="5929460" y="2086781"/>
-            <a:ext cx="5070912" cy="2976598"/>
-          </a:xfrm>
-          <a:prstGeom prst="rect">
-            <a:avLst/>
-          </a:prstGeom>
-        </p:spPr>
-      </p:pic>
-      <p:sp>
-        <p:nvSpPr>
-          <p:cNvPr id="17" name="TextBox 16">
-            <a:extLst>
-              <a:ext uri="{FF2B5EF4-FFF2-40B4-BE49-F238E27FC236}">
-                <a16:creationId xmlns:a16="http://schemas.microsoft.com/office/drawing/2014/main" id="{24A5367F-4374-6908-81EC-5999479FB6E2}"/>
-              </a:ext>
-            </a:extLst>
-          </p:cNvPr>
-          <p:cNvSpPr txBox="1"/>
-          <p:nvPr/>
-        </p:nvSpPr>
-        <p:spPr>
-          <a:xfrm>
-            <a:off x="609600" y="5410200"/>
-            <a:ext cx="5093616" cy="738664"/>
-          </a:xfrm>
-          <a:prstGeom prst="rect">
-            <a:avLst/>
-          </a:prstGeom>
-          <a:noFill/>
-        </p:spPr>
-        <p:txBody>
-          <a:bodyPr wrap="square" rtlCol="0">
-            <a:spAutoFit/>
-          </a:bodyPr>
-          <a:lstStyle/>
-          <a:p>
-            <a:r>
-              <a:rPr lang="en-TH" sz="1400" dirty="0"/>
-              <a:t>ระดับตัวแปรเดี่ยว (Individual Features) ตัวชี้วัดที่สำคัญที่สุดอันดับหนึ่งคือ atr_14_pct (Average True Range Percentage) รองลงมาคือตัวชี้วัดด้านโมเมนตัม ได้แก่ rsi_14 (Relative Strength Index) และ roc_10 (Rate of Change)</a:t>
-            </a:r>
-          </a:p>
-        </p:txBody>
-      </p:sp>
-      <p:sp>
-        <p:nvSpPr>
-          <p:cNvPr id="18" name="TextBox 17">
-            <a:extLst>
-              <a:ext uri="{FF2B5EF4-FFF2-40B4-BE49-F238E27FC236}">
-                <a16:creationId xmlns:a16="http://schemas.microsoft.com/office/drawing/2014/main" id="{690439B4-9ADD-3389-838B-C911C429EFAF}"/>
-              </a:ext>
-            </a:extLst>
-          </p:cNvPr>
-          <p:cNvSpPr txBox="1"/>
-          <p:nvPr/>
-        </p:nvSpPr>
-        <p:spPr>
-          <a:xfrm>
-            <a:off x="6096000" y="5410200"/>
-            <a:ext cx="4953000" cy="1169551"/>
-          </a:xfrm>
-          <a:prstGeom prst="rect">
-            <a:avLst/>
-          </a:prstGeom>
-          <a:noFill/>
-        </p:spPr>
-        <p:txBody>
-          <a:bodyPr wrap="square" rtlCol="0">
-            <a:spAutoFit/>
-          </a:bodyPr>
-          <a:lstStyle/>
-          <a:p>
-            <a:r>
-              <a:rPr lang="en-TH" sz="1400" dirty="0"/>
-              <a:t>ระดับกลุ่มตัวแปร (Indicator Families) กลุ่มตัวแปรด้านความผันผวน (Volatility) และโมเมนตัมระยะสั้น (Momentum) เป็นกลไกหลักที่ทรงอิทธิพลที่สุดในการตัดสินใจของโมเดล ในทางกลับกัน ตัวชี้วัดกลุ่มแนวโน้ม (Trend) แทบไม่มีประโยชน์ต่อการทำนายระยะ 1 วันเลย และกลุ่มปริมาณการซื้อขาย (Volume) มีค่าความสำคัญติดลบ ซึ่งหมายความว่าทำให้ประสิทธิภาพการทำนายลดลง</a:t>
-            </a:r>
-          </a:p>
-        </p:txBody>
-      </p:sp>
-    </p:spTree>
-    <p:extLst>
-      <p:ext uri="{BB962C8B-B14F-4D97-AF65-F5344CB8AC3E}">
-        <p14:creationId xmlns:p14="http://schemas.microsoft.com/office/powerpoint/2010/main" val="2157749109"/>
-      </p:ext>
-    </p:extLst>
-  </p:cSld>
-  <p:clrMapOvr>
-    <a:masterClrMapping/>
-  </p:clrMapOvr>
-</p:sld>
-</file>
-
-<file path=ppt/slides/slide21.xml><?xml version="1.0" encoding="utf-8"?>
-<p:sld xmlns:a="http://schemas.openxmlformats.org/drawingml/2006/main" xmlns:r="http://schemas.openxmlformats.org/officeDocument/2006/relationships" xmlns:p="http://schemas.openxmlformats.org/presentationml/2006/main">
-  <p:cSld>
-    <p:spTree>
-      <p:nvGrpSpPr>
-        <p:cNvPr id="1" name="">
-          <a:extLst>
-            <a:ext uri="{FF2B5EF4-FFF2-40B4-BE49-F238E27FC236}">
               <a16:creationId xmlns:a16="http://schemas.microsoft.com/office/drawing/2014/main" id="{A4531942-0115-DAA2-7654-2D6C009E18D6}"/>
             </a:ext>
           </a:extLst>
@@ -10644,7 +9528,7 @@
 </p:sld>
 </file>
 
-<file path=ppt/slides/slide22.xml><?xml version="1.0" encoding="utf-8"?>
+<file path=ppt/slides/slide21.xml><?xml version="1.0" encoding="utf-8"?>
 <p:sld xmlns:a="http://schemas.openxmlformats.org/drawingml/2006/main" xmlns:r="http://schemas.openxmlformats.org/officeDocument/2006/relationships" xmlns:p="http://schemas.openxmlformats.org/presentationml/2006/main">
   <p:cSld>
     <p:bg>
